--- a/data/reports/prateleiras-2026-09-20.pptx
+++ b/data/reports/prateleiras-2026-09-20.pptx
@@ -13,6 +13,7 @@
     <p:sldId id="261" r:id="rId12"/>
     <p:sldId id="262" r:id="rId13"/>
     <p:sldId id="263" r:id="rId14"/>
+    <p:sldId id="264" r:id="rId15"/>
   </p:sldIdLst>
   <p:sldSz cx="12191695" cy="6858000" type="screen4x3"/>
   <p:notesSz cx="6858000" cy="9144000"/>
@@ -3706,7 +3707,7 @@
                 </a:solidFill>
                 <a:latin typeface="Calibri"/>
               </a:rPr>
-              <a:t>catalogo: 6.604</a:t>
+              <a:t>catalogo: 6.618</a:t>
             </a:r>
           </a:p>
         </p:txBody>
@@ -4599,13 +4600,13 @@
                           </a:solidFill>
                           <a:latin typeface="Calibri"/>
                         </a:rPr>
-                        <a:t>84</a:t>
-                      </a:r>
-                    </a:p>
-                  </a:txBody>
-                  <a:tcPr>
-                    <a:solidFill>
-                      <a:srgbClr val="3987E5"/>
+                        <a:t>93</a:t>
+                      </a:r>
+                    </a:p>
+                  </a:txBody>
+                  <a:tcPr>
+                    <a:solidFill>
+                      <a:srgbClr val="184F95"/>
                     </a:solidFill>
                   </a:tcPr>
                 </a:tc>
@@ -4621,7 +4622,29 @@
                           </a:solidFill>
                           <a:latin typeface="Calibri"/>
                         </a:rPr>
-                        <a:t>109</a:t>
+                        <a:t>114</a:t>
+                      </a:r>
+                    </a:p>
+                  </a:txBody>
+                  <a:tcPr>
+                    <a:solidFill>
+                      <a:srgbClr val="0D366B"/>
+                    </a:solidFill>
+                  </a:tcPr>
+                </a:tc>
+                <a:tc>
+                  <a:txBody>
+                    <a:bodyPr wrap="square"/>
+                    <a:lstStyle/>
+                    <a:p>
+                      <a:r>
+                        <a:rPr sz="1000" b="0">
+                          <a:solidFill>
+                            <a:srgbClr val="FFFFFF"/>
+                          </a:solidFill>
+                          <a:latin typeface="Calibri"/>
+                        </a:rPr>
+                        <a:t>75</a:t>
                       </a:r>
                     </a:p>
                   </a:txBody>
@@ -4639,39 +4662,17 @@
                       <a:r>
                         <a:rPr sz="1000" b="0">
                           <a:solidFill>
-                            <a:srgbClr val="0B0B0B"/>
-                          </a:solidFill>
-                          <a:latin typeface="Calibri"/>
-                        </a:rPr>
-                        <a:t>4</a:t>
-                      </a:r>
-                    </a:p>
-                  </a:txBody>
-                  <a:tcPr>
-                    <a:solidFill>
-                      <a:srgbClr val="CDE2FB"/>
-                    </a:solidFill>
-                  </a:tcPr>
-                </a:tc>
-                <a:tc>
-                  <a:txBody>
-                    <a:bodyPr wrap="square"/>
-                    <a:lstStyle/>
-                    <a:p>
-                      <a:r>
-                        <a:rPr sz="1000" b="0">
-                          <a:solidFill>
                             <a:srgbClr val="FFFFFF"/>
                           </a:solidFill>
                           <a:latin typeface="Calibri"/>
                         </a:rPr>
-                        <a:t>89</a:t>
-                      </a:r>
-                    </a:p>
-                  </a:txBody>
-                  <a:tcPr>
-                    <a:solidFill>
-                      <a:srgbClr val="3987E5"/>
+                        <a:t>105</a:t>
+                      </a:r>
+                    </a:p>
+                  </a:txBody>
+                  <a:tcPr>
+                    <a:solidFill>
+                      <a:srgbClr val="0D366B"/>
                     </a:solidFill>
                   </a:tcPr>
                 </a:tc>
@@ -4711,79 +4712,79 @@
                           </a:solidFill>
                           <a:latin typeface="Calibri"/>
                         </a:rPr>
+                        <a:t>78</a:t>
+                      </a:r>
+                    </a:p>
+                  </a:txBody>
+                  <a:tcPr>
+                    <a:solidFill>
+                      <a:srgbClr val="256ABF"/>
+                    </a:solidFill>
+                  </a:tcPr>
+                </a:tc>
+                <a:tc>
+                  <a:txBody>
+                    <a:bodyPr wrap="square"/>
+                    <a:lstStyle/>
+                    <a:p>
+                      <a:r>
+                        <a:rPr sz="1000" b="0">
+                          <a:solidFill>
+                            <a:srgbClr val="FFFFFF"/>
+                          </a:solidFill>
+                          <a:latin typeface="Calibri"/>
+                        </a:rPr>
+                        <a:t>99</a:t>
+                      </a:r>
+                    </a:p>
+                  </a:txBody>
+                  <a:tcPr>
+                    <a:solidFill>
+                      <a:srgbClr val="0D366B"/>
+                    </a:solidFill>
+                  </a:tcPr>
+                </a:tc>
+                <a:tc>
+                  <a:txBody>
+                    <a:bodyPr wrap="square"/>
+                    <a:lstStyle/>
+                    <a:p>
+                      <a:r>
+                        <a:rPr sz="1000" b="0">
+                          <a:solidFill>
+                            <a:srgbClr val="FFFFFF"/>
+                          </a:solidFill>
+                          <a:latin typeface="Calibri"/>
+                        </a:rPr>
+                        <a:t>92</a:t>
+                      </a:r>
+                    </a:p>
+                  </a:txBody>
+                  <a:tcPr>
+                    <a:solidFill>
+                      <a:srgbClr val="184F95"/>
+                    </a:solidFill>
+                  </a:tcPr>
+                </a:tc>
+                <a:tc>
+                  <a:txBody>
+                    <a:bodyPr wrap="square"/>
+                    <a:lstStyle/>
+                    <a:p>
+                      <a:r>
+                        <a:rPr sz="1000" b="0">
+                          <a:solidFill>
+                            <a:srgbClr val="FFFFFF"/>
+                          </a:solidFill>
+                          <a:latin typeface="Calibri"/>
+                        </a:rPr>
                         <a:t>76</a:t>
                       </a:r>
                     </a:p>
                   </a:txBody>
                   <a:tcPr>
                     <a:solidFill>
-                      <a:srgbClr val="3987E5"/>
-                    </a:solidFill>
-                  </a:tcPr>
-                </a:tc>
-                <a:tc>
-                  <a:txBody>
-                    <a:bodyPr wrap="square"/>
-                    <a:lstStyle/>
-                    <a:p>
-                      <a:r>
-                        <a:rPr sz="1000" b="0">
-                          <a:solidFill>
-                            <a:srgbClr val="FFFFFF"/>
-                          </a:solidFill>
-                          <a:latin typeface="Calibri"/>
-                        </a:rPr>
-                        <a:t>91</a:t>
-                      </a:r>
-                    </a:p>
-                  </a:txBody>
-                  <a:tcPr>
-                    <a:solidFill>
-                      <a:srgbClr val="3987E5"/>
-                    </a:solidFill>
-                  </a:tcPr>
-                </a:tc>
-                <a:tc>
-                  <a:txBody>
-                    <a:bodyPr wrap="square"/>
-                    <a:lstStyle/>
-                    <a:p>
-                      <a:r>
-                        <a:rPr sz="1000" b="0">
-                          <a:solidFill>
-                            <a:srgbClr val="0B0B0B"/>
-                          </a:solidFill>
-                          <a:latin typeface="Calibri"/>
-                        </a:rPr>
-                        <a:t>1</a:t>
-                      </a:r>
-                    </a:p>
-                  </a:txBody>
-                  <a:tcPr>
-                    <a:solidFill>
-                      <a:srgbClr val="CDE2FB"/>
-                    </a:solidFill>
-                  </a:tcPr>
-                </a:tc>
-                <a:tc>
-                  <a:txBody>
-                    <a:bodyPr wrap="square"/>
-                    <a:lstStyle/>
-                    <a:p>
-                      <a:r>
-                        <a:rPr sz="1000" b="0">
-                          <a:solidFill>
-                            <a:srgbClr val="0B0B0B"/>
-                          </a:solidFill>
-                          <a:latin typeface="Calibri"/>
-                        </a:rPr>
-                        <a:t>63</a:t>
-                      </a:r>
-                    </a:p>
-                  </a:txBody>
-                  <a:tcPr>
-                    <a:solidFill>
-                      <a:srgbClr val="6DA7EC"/>
+                      <a:srgbClr val="256ABF"/>
                     </a:solidFill>
                   </a:tcPr>
                 </a:tc>
@@ -4823,13 +4824,13 @@
                           </a:solidFill>
                           <a:latin typeface="Calibri"/>
                         </a:rPr>
-                        <a:t>96</a:t>
-                      </a:r>
-                    </a:p>
-                  </a:txBody>
-                  <a:tcPr>
-                    <a:solidFill>
-                      <a:srgbClr val="3987E5"/>
+                        <a:t>104</a:t>
+                      </a:r>
+                    </a:p>
+                  </a:txBody>
+                  <a:tcPr>
+                    <a:solidFill>
+                      <a:srgbClr val="0D366B"/>
                     </a:solidFill>
                   </a:tcPr>
                 </a:tc>
@@ -4845,7 +4846,29 @@
                           </a:solidFill>
                           <a:latin typeface="Calibri"/>
                         </a:rPr>
-                        <a:t>101</a:t>
+                        <a:t>105</a:t>
+                      </a:r>
+                    </a:p>
+                  </a:txBody>
+                  <a:tcPr>
+                    <a:solidFill>
+                      <a:srgbClr val="0D366B"/>
+                    </a:solidFill>
+                  </a:tcPr>
+                </a:tc>
+                <a:tc>
+                  <a:txBody>
+                    <a:bodyPr wrap="square"/>
+                    <a:lstStyle/>
+                    <a:p>
+                      <a:r>
+                        <a:rPr sz="1000" b="0">
+                          <a:solidFill>
+                            <a:srgbClr val="FFFFFF"/>
+                          </a:solidFill>
+                          <a:latin typeface="Calibri"/>
+                        </a:rPr>
+                        <a:t>75</a:t>
                       </a:r>
                     </a:p>
                   </a:txBody>
@@ -4867,29 +4890,7 @@
                           </a:solidFill>
                           <a:latin typeface="Calibri"/>
                         </a:rPr>
-                        <a:t>3</a:t>
-                      </a:r>
-                    </a:p>
-                  </a:txBody>
-                  <a:tcPr>
-                    <a:solidFill>
-                      <a:srgbClr val="CDE2FB"/>
-                    </a:solidFill>
-                  </a:tcPr>
-                </a:tc>
-                <a:tc>
-                  <a:txBody>
-                    <a:bodyPr wrap="square"/>
-                    <a:lstStyle/>
-                    <a:p>
-                      <a:r>
-                        <a:rPr sz="1000" b="0">
-                          <a:solidFill>
-                            <a:srgbClr val="0B0B0B"/>
-                          </a:solidFill>
-                          <a:latin typeface="Calibri"/>
-                        </a:rPr>
-                        <a:t>27</a:t>
+                        <a:t>28</a:t>
                       </a:r>
                     </a:p>
                   </a:txBody>
@@ -4913,57 +4914,79 @@
                           </a:solidFill>
                           <a:latin typeface="Calibri"/>
                         </a:rPr>
-                        <a:t>Multimercado</a:t>
-                      </a:r>
-                    </a:p>
-                  </a:txBody>
-                  <a:tcPr>
-                    <a:solidFill>
-                      <a:srgbClr val="FFFFFF"/>
-                    </a:solidFill>
-                  </a:tcPr>
-                </a:tc>
-                <a:tc>
-                  <a:txBody>
-                    <a:bodyPr wrap="square"/>
-                    <a:lstStyle/>
-                    <a:p>
-                      <a:r>
-                        <a:rPr sz="1000" b="0">
-                          <a:solidFill>
-                            <a:srgbClr val="0B0B0B"/>
-                          </a:solidFill>
-                          <a:latin typeface="Calibri"/>
-                        </a:rPr>
-                        <a:t>9</a:t>
-                      </a:r>
-                    </a:p>
-                  </a:txBody>
-                  <a:tcPr>
-                    <a:solidFill>
-                      <a:srgbClr val="CDE2FB"/>
-                    </a:solidFill>
-                  </a:tcPr>
-                </a:tc>
-                <a:tc>
-                  <a:txBody>
-                    <a:bodyPr wrap="square"/>
-                    <a:lstStyle/>
-                    <a:p>
-                      <a:r>
-                        <a:rPr sz="1000" b="0">
-                          <a:solidFill>
-                            <a:srgbClr val="898781"/>
-                          </a:solidFill>
-                          <a:latin typeface="Calibri"/>
-                        </a:rPr>
-                        <a:t>-</a:t>
-                      </a:r>
-                    </a:p>
-                  </a:txBody>
-                  <a:tcPr>
-                    <a:solidFill>
-                      <a:srgbClr val="FFFFFF"/>
+                        <a:t>Multimercados Macro</a:t>
+                      </a:r>
+                    </a:p>
+                  </a:txBody>
+                  <a:tcPr>
+                    <a:solidFill>
+                      <a:srgbClr val="FFFFFF"/>
+                    </a:solidFill>
+                  </a:tcPr>
+                </a:tc>
+                <a:tc>
+                  <a:txBody>
+                    <a:bodyPr wrap="square"/>
+                    <a:lstStyle/>
+                    <a:p>
+                      <a:r>
+                        <a:rPr sz="1000" b="0">
+                          <a:solidFill>
+                            <a:srgbClr val="0B0B0B"/>
+                          </a:solidFill>
+                          <a:latin typeface="Calibri"/>
+                        </a:rPr>
+                        <a:t>44</a:t>
+                      </a:r>
+                    </a:p>
+                  </a:txBody>
+                  <a:tcPr>
+                    <a:solidFill>
+                      <a:srgbClr val="6DA7EC"/>
+                    </a:solidFill>
+                  </a:tcPr>
+                </a:tc>
+                <a:tc>
+                  <a:txBody>
+                    <a:bodyPr wrap="square"/>
+                    <a:lstStyle/>
+                    <a:p>
+                      <a:r>
+                        <a:rPr sz="1000" b="0">
+                          <a:solidFill>
+                            <a:srgbClr val="0B0B0B"/>
+                          </a:solidFill>
+                          <a:latin typeface="Calibri"/>
+                        </a:rPr>
+                        <a:t>35</a:t>
+                      </a:r>
+                    </a:p>
+                  </a:txBody>
+                  <a:tcPr>
+                    <a:solidFill>
+                      <a:srgbClr val="6DA7EC"/>
+                    </a:solidFill>
+                  </a:tcPr>
+                </a:tc>
+                <a:tc>
+                  <a:txBody>
+                    <a:bodyPr wrap="square"/>
+                    <a:lstStyle/>
+                    <a:p>
+                      <a:r>
+                        <a:rPr sz="1000" b="0">
+                          <a:solidFill>
+                            <a:srgbClr val="0B0B0B"/>
+                          </a:solidFill>
+                          <a:latin typeface="Calibri"/>
+                        </a:rPr>
+                        <a:t>39</a:t>
+                      </a:r>
+                    </a:p>
+                  </a:txBody>
+                  <a:tcPr>
+                    <a:solidFill>
+                      <a:srgbClr val="6DA7EC"/>
                     </a:solidFill>
                   </a:tcPr>
                 </a:tc>
@@ -4979,35 +5002,13 @@
                           </a:solidFill>
                           <a:latin typeface="Calibri"/>
                         </a:rPr>
-                        <a:t>169</a:t>
-                      </a:r>
-                    </a:p>
-                  </a:txBody>
-                  <a:tcPr>
-                    <a:solidFill>
-                      <a:srgbClr val="0D366B"/>
-                    </a:solidFill>
-                  </a:tcPr>
-                </a:tc>
-                <a:tc>
-                  <a:txBody>
-                    <a:bodyPr wrap="square"/>
-                    <a:lstStyle/>
-                    <a:p>
-                      <a:r>
-                        <a:rPr sz="1000" b="0">
-                          <a:solidFill>
-                            <a:srgbClr val="0B0B0B"/>
-                          </a:solidFill>
-                          <a:latin typeface="Calibri"/>
-                        </a:rPr>
-                        <a:t>49</a:t>
-                      </a:r>
-                    </a:p>
-                  </a:txBody>
-                  <a:tcPr>
-                    <a:solidFill>
-                      <a:srgbClr val="6DA7EC"/>
+                        <a:t>53</a:t>
+                      </a:r>
+                    </a:p>
+                  </a:txBody>
+                  <a:tcPr>
+                    <a:solidFill>
+                      <a:srgbClr val="3987E5"/>
                     </a:solidFill>
                   </a:tcPr>
                 </a:tc>
@@ -5025,95 +5026,95 @@
                           </a:solidFill>
                           <a:latin typeface="Calibri"/>
                         </a:rPr>
-                        <a:t>Acoes</a:t>
-                      </a:r>
-                    </a:p>
-                  </a:txBody>
-                  <a:tcPr>
-                    <a:solidFill>
-                      <a:srgbClr val="FFFFFF"/>
-                    </a:solidFill>
-                  </a:tcPr>
-                </a:tc>
-                <a:tc>
-                  <a:txBody>
-                    <a:bodyPr wrap="square"/>
-                    <a:lstStyle/>
-                    <a:p>
-                      <a:r>
-                        <a:rPr sz="1000" b="0">
-                          <a:solidFill>
-                            <a:srgbClr val="0B0B0B"/>
-                          </a:solidFill>
-                          <a:latin typeface="Calibri"/>
-                        </a:rPr>
-                        <a:t>12</a:t>
-                      </a:r>
-                    </a:p>
-                  </a:txBody>
-                  <a:tcPr>
-                    <a:solidFill>
-                      <a:srgbClr val="CDE2FB"/>
-                    </a:solidFill>
-                  </a:tcPr>
-                </a:tc>
-                <a:tc>
-                  <a:txBody>
-                    <a:bodyPr wrap="square"/>
-                    <a:lstStyle/>
-                    <a:p>
-                      <a:r>
-                        <a:rPr sz="1000" b="0">
-                          <a:solidFill>
-                            <a:srgbClr val="898781"/>
-                          </a:solidFill>
-                          <a:latin typeface="Calibri"/>
-                        </a:rPr>
-                        <a:t>-</a:t>
-                      </a:r>
-                    </a:p>
-                  </a:txBody>
-                  <a:tcPr>
-                    <a:solidFill>
-                      <a:srgbClr val="FFFFFF"/>
-                    </a:solidFill>
-                  </a:tcPr>
-                </a:tc>
-                <a:tc>
-                  <a:txBody>
-                    <a:bodyPr wrap="square"/>
-                    <a:lstStyle/>
-                    <a:p>
-                      <a:r>
-                        <a:rPr sz="1000" b="0">
-                          <a:solidFill>
-                            <a:srgbClr val="FFFFFF"/>
-                          </a:solidFill>
-                          <a:latin typeface="Calibri"/>
-                        </a:rPr>
-                        <a:t>101</a:t>
-                      </a:r>
-                    </a:p>
-                  </a:txBody>
-                  <a:tcPr>
-                    <a:solidFill>
-                      <a:srgbClr val="256ABF"/>
-                    </a:solidFill>
-                  </a:tcPr>
-                </a:tc>
-                <a:tc>
-                  <a:txBody>
-                    <a:bodyPr wrap="square"/>
-                    <a:lstStyle/>
-                    <a:p>
-                      <a:r>
-                        <a:rPr sz="1000" b="0">
-                          <a:solidFill>
-                            <a:srgbClr val="0B0B0B"/>
-                          </a:solidFill>
-                          <a:latin typeface="Calibri"/>
-                        </a:rPr>
-                        <a:t>30</a:t>
+                        <a:t>Multimercados Invest. no Exterior</a:t>
+                      </a:r>
+                    </a:p>
+                  </a:txBody>
+                  <a:tcPr>
+                    <a:solidFill>
+                      <a:srgbClr val="FFFFFF"/>
+                    </a:solidFill>
+                  </a:tcPr>
+                </a:tc>
+                <a:tc>
+                  <a:txBody>
+                    <a:bodyPr wrap="square"/>
+                    <a:lstStyle/>
+                    <a:p>
+                      <a:r>
+                        <a:rPr sz="1000" b="0">
+                          <a:solidFill>
+                            <a:srgbClr val="0B0B0B"/>
+                          </a:solidFill>
+                          <a:latin typeface="Calibri"/>
+                        </a:rPr>
+                        <a:t>31</a:t>
+                      </a:r>
+                    </a:p>
+                  </a:txBody>
+                  <a:tcPr>
+                    <a:solidFill>
+                      <a:srgbClr val="9EC5F4"/>
+                    </a:solidFill>
+                  </a:tcPr>
+                </a:tc>
+                <a:tc>
+                  <a:txBody>
+                    <a:bodyPr wrap="square"/>
+                    <a:lstStyle/>
+                    <a:p>
+                      <a:r>
+                        <a:rPr sz="1000" b="0">
+                          <a:solidFill>
+                            <a:srgbClr val="0B0B0B"/>
+                          </a:solidFill>
+                          <a:latin typeface="Calibri"/>
+                        </a:rPr>
+                        <a:t>45</a:t>
+                      </a:r>
+                    </a:p>
+                  </a:txBody>
+                  <a:tcPr>
+                    <a:solidFill>
+                      <a:srgbClr val="6DA7EC"/>
+                    </a:solidFill>
+                  </a:tcPr>
+                </a:tc>
+                <a:tc>
+                  <a:txBody>
+                    <a:bodyPr wrap="square"/>
+                    <a:lstStyle/>
+                    <a:p>
+                      <a:r>
+                        <a:rPr sz="1000" b="0">
+                          <a:solidFill>
+                            <a:srgbClr val="0B0B0B"/>
+                          </a:solidFill>
+                          <a:latin typeface="Calibri"/>
+                        </a:rPr>
+                        <a:t>33</a:t>
+                      </a:r>
+                    </a:p>
+                  </a:txBody>
+                  <a:tcPr>
+                    <a:solidFill>
+                      <a:srgbClr val="6DA7EC"/>
+                    </a:solidFill>
+                  </a:tcPr>
+                </a:tc>
+                <a:tc>
+                  <a:txBody>
+                    <a:bodyPr wrap="square"/>
+                    <a:lstStyle/>
+                    <a:p>
+                      <a:r>
+                        <a:rPr sz="1000" b="0">
+                          <a:solidFill>
+                            <a:srgbClr val="0B0B0B"/>
+                          </a:solidFill>
+                          <a:latin typeface="Calibri"/>
+                        </a:rPr>
+                        <a:t>22</a:t>
                       </a:r>
                     </a:p>
                   </a:txBody>
@@ -5137,101 +5138,101 @@
                           </a:solidFill>
                           <a:latin typeface="Calibri"/>
                         </a:rPr>
-                        <a:t>Renda Fixa</a:t>
-                      </a:r>
-                    </a:p>
-                  </a:txBody>
-                  <a:tcPr>
-                    <a:solidFill>
-                      <a:srgbClr val="FFFFFF"/>
-                    </a:solidFill>
-                  </a:tcPr>
-                </a:tc>
-                <a:tc>
-                  <a:txBody>
-                    <a:bodyPr wrap="square"/>
-                    <a:lstStyle/>
-                    <a:p>
-                      <a:r>
-                        <a:rPr sz="1000" b="0">
-                          <a:solidFill>
-                            <a:srgbClr val="0B0B0B"/>
-                          </a:solidFill>
-                          <a:latin typeface="Calibri"/>
-                        </a:rPr>
-                        <a:t>26</a:t>
+                        <a:t>Renda Fixa Duração Livre Grau de Invest.</a:t>
+                      </a:r>
+                    </a:p>
+                  </a:txBody>
+                  <a:tcPr>
+                    <a:solidFill>
+                      <a:srgbClr val="FFFFFF"/>
+                    </a:solidFill>
+                  </a:tcPr>
+                </a:tc>
+                <a:tc>
+                  <a:txBody>
+                    <a:bodyPr wrap="square"/>
+                    <a:lstStyle/>
+                    <a:p>
+                      <a:r>
+                        <a:rPr sz="1000" b="0">
+                          <a:solidFill>
+                            <a:srgbClr val="0B0B0B"/>
+                          </a:solidFill>
+                          <a:latin typeface="Calibri"/>
+                        </a:rPr>
+                        <a:t>40</a:t>
+                      </a:r>
+                    </a:p>
+                  </a:txBody>
+                  <a:tcPr>
+                    <a:solidFill>
+                      <a:srgbClr val="6DA7EC"/>
+                    </a:solidFill>
+                  </a:tcPr>
+                </a:tc>
+                <a:tc>
+                  <a:txBody>
+                    <a:bodyPr wrap="square"/>
+                    <a:lstStyle/>
+                    <a:p>
+                      <a:r>
+                        <a:rPr sz="1000" b="0">
+                          <a:solidFill>
+                            <a:srgbClr val="0B0B0B"/>
+                          </a:solidFill>
+                          <a:latin typeface="Calibri"/>
+                        </a:rPr>
+                        <a:t>40</a:t>
+                      </a:r>
+                    </a:p>
+                  </a:txBody>
+                  <a:tcPr>
+                    <a:solidFill>
+                      <a:srgbClr val="6DA7EC"/>
+                    </a:solidFill>
+                  </a:tcPr>
+                </a:tc>
+                <a:tc>
+                  <a:txBody>
+                    <a:bodyPr wrap="square"/>
+                    <a:lstStyle/>
+                    <a:p>
+                      <a:r>
+                        <a:rPr sz="1000" b="0">
+                          <a:solidFill>
+                            <a:srgbClr val="0B0B0B"/>
+                          </a:solidFill>
+                          <a:latin typeface="Calibri"/>
+                        </a:rPr>
+                        <a:t>14</a:t>
+                      </a:r>
+                    </a:p>
+                  </a:txBody>
+                  <a:tcPr>
+                    <a:solidFill>
+                      <a:srgbClr val="CDE2FB"/>
+                    </a:solidFill>
+                  </a:tcPr>
+                </a:tc>
+                <a:tc>
+                  <a:txBody>
+                    <a:bodyPr wrap="square"/>
+                    <a:lstStyle/>
+                    <a:p>
+                      <a:r>
+                        <a:rPr sz="1000" b="0">
+                          <a:solidFill>
+                            <a:srgbClr val="0B0B0B"/>
+                          </a:solidFill>
+                          <a:latin typeface="Calibri"/>
+                        </a:rPr>
+                        <a:t>24</a:t>
                       </a:r>
                     </a:p>
                   </a:txBody>
                   <a:tcPr>
                     <a:solidFill>
                       <a:srgbClr val="9EC5F4"/>
-                    </a:solidFill>
-                  </a:tcPr>
-                </a:tc>
-                <a:tc>
-                  <a:txBody>
-                    <a:bodyPr wrap="square"/>
-                    <a:lstStyle/>
-                    <a:p>
-                      <a:r>
-                        <a:rPr sz="1000" b="0">
-                          <a:solidFill>
-                            <a:srgbClr val="898781"/>
-                          </a:solidFill>
-                          <a:latin typeface="Calibri"/>
-                        </a:rPr>
-                        <a:t>-</a:t>
-                      </a:r>
-                    </a:p>
-                  </a:txBody>
-                  <a:tcPr>
-                    <a:solidFill>
-                      <a:srgbClr val="FFFFFF"/>
-                    </a:solidFill>
-                  </a:tcPr>
-                </a:tc>
-                <a:tc>
-                  <a:txBody>
-                    <a:bodyPr wrap="square"/>
-                    <a:lstStyle/>
-                    <a:p>
-                      <a:r>
-                        <a:rPr sz="1000" b="0">
-                          <a:solidFill>
-                            <a:srgbClr val="FFFFFF"/>
-                          </a:solidFill>
-                          <a:latin typeface="Calibri"/>
-                        </a:rPr>
-                        <a:t>115</a:t>
-                      </a:r>
-                    </a:p>
-                  </a:txBody>
-                  <a:tcPr>
-                    <a:solidFill>
-                      <a:srgbClr val="256ABF"/>
-                    </a:solidFill>
-                  </a:tcPr>
-                </a:tc>
-                <a:tc>
-                  <a:txBody>
-                    <a:bodyPr wrap="square"/>
-                    <a:lstStyle/>
-                    <a:p>
-                      <a:r>
-                        <a:rPr sz="1000" b="0">
-                          <a:solidFill>
-                            <a:srgbClr val="898781"/>
-                          </a:solidFill>
-                          <a:latin typeface="Calibri"/>
-                        </a:rPr>
-                        <a:t>-</a:t>
-                      </a:r>
-                    </a:p>
-                  </a:txBody>
-                  <a:tcPr>
-                    <a:solidFill>
-                      <a:srgbClr val="FFFFFF"/>
                     </a:solidFill>
                   </a:tcPr>
                 </a:tc>
@@ -5249,29 +5250,73 @@
                           </a:solidFill>
                           <a:latin typeface="Calibri"/>
                         </a:rPr>
-                        <a:t>Multimercados Macro</a:t>
-                      </a:r>
-                    </a:p>
-                  </a:txBody>
-                  <a:tcPr>
-                    <a:solidFill>
-                      <a:srgbClr val="FFFFFF"/>
-                    </a:solidFill>
-                  </a:tcPr>
-                </a:tc>
-                <a:tc>
-                  <a:txBody>
-                    <a:bodyPr wrap="square"/>
-                    <a:lstStyle/>
-                    <a:p>
-                      <a:r>
-                        <a:rPr sz="1000" b="0">
-                          <a:solidFill>
-                            <a:srgbClr val="0B0B0B"/>
-                          </a:solidFill>
-                          <a:latin typeface="Calibri"/>
-                        </a:rPr>
-                        <a:t>40</a:t>
+                        <a:t>Ações Invest. no Exterior</a:t>
+                      </a:r>
+                    </a:p>
+                  </a:txBody>
+                  <a:tcPr>
+                    <a:solidFill>
+                      <a:srgbClr val="FFFFFF"/>
+                    </a:solidFill>
+                  </a:tcPr>
+                </a:tc>
+                <a:tc>
+                  <a:txBody>
+                    <a:bodyPr wrap="square"/>
+                    <a:lstStyle/>
+                    <a:p>
+                      <a:r>
+                        <a:rPr sz="1000" b="0">
+                          <a:solidFill>
+                            <a:srgbClr val="0B0B0B"/>
+                          </a:solidFill>
+                          <a:latin typeface="Calibri"/>
+                        </a:rPr>
+                        <a:t>38</a:t>
+                      </a:r>
+                    </a:p>
+                  </a:txBody>
+                  <a:tcPr>
+                    <a:solidFill>
+                      <a:srgbClr val="6DA7EC"/>
+                    </a:solidFill>
+                  </a:tcPr>
+                </a:tc>
+                <a:tc>
+                  <a:txBody>
+                    <a:bodyPr wrap="square"/>
+                    <a:lstStyle/>
+                    <a:p>
+                      <a:r>
+                        <a:rPr sz="1000" b="0">
+                          <a:solidFill>
+                            <a:srgbClr val="0B0B0B"/>
+                          </a:solidFill>
+                          <a:latin typeface="Calibri"/>
+                        </a:rPr>
+                        <a:t>38</a:t>
+                      </a:r>
+                    </a:p>
+                  </a:txBody>
+                  <a:tcPr>
+                    <a:solidFill>
+                      <a:srgbClr val="6DA7EC"/>
+                    </a:solidFill>
+                  </a:tcPr>
+                </a:tc>
+                <a:tc>
+                  <a:txBody>
+                    <a:bodyPr wrap="square"/>
+                    <a:lstStyle/>
+                    <a:p>
+                      <a:r>
+                        <a:rPr sz="1000" b="0">
+                          <a:solidFill>
+                            <a:srgbClr val="0B0B0B"/>
+                          </a:solidFill>
+                          <a:latin typeface="Calibri"/>
+                        </a:rPr>
+                        <a:t>24</a:t>
                       </a:r>
                     </a:p>
                   </a:txBody>
@@ -5293,51 +5338,7 @@
                           </a:solidFill>
                           <a:latin typeface="Calibri"/>
                         </a:rPr>
-                        <a:t>35</a:t>
-                      </a:r>
-                    </a:p>
-                  </a:txBody>
-                  <a:tcPr>
-                    <a:solidFill>
-                      <a:srgbClr val="9EC5F4"/>
-                    </a:solidFill>
-                  </a:tcPr>
-                </a:tc>
-                <a:tc>
-                  <a:txBody>
-                    <a:bodyPr wrap="square"/>
-                    <a:lstStyle/>
-                    <a:p>
-                      <a:r>
-                        <a:rPr sz="1000" b="0">
-                          <a:solidFill>
-                            <a:srgbClr val="0B0B0B"/>
-                          </a:solidFill>
-                          <a:latin typeface="Calibri"/>
-                        </a:rPr>
-                        <a:t>1</a:t>
-                      </a:r>
-                    </a:p>
-                  </a:txBody>
-                  <a:tcPr>
-                    <a:solidFill>
-                      <a:srgbClr val="CDE2FB"/>
-                    </a:solidFill>
-                  </a:tcPr>
-                </a:tc>
-                <a:tc>
-                  <a:txBody>
-                    <a:bodyPr wrap="square"/>
-                    <a:lstStyle/>
-                    <a:p>
-                      <a:r>
-                        <a:rPr sz="1000" b="0">
-                          <a:solidFill>
-                            <a:srgbClr val="0B0B0B"/>
-                          </a:solidFill>
-                          <a:latin typeface="Calibri"/>
-                        </a:rPr>
-                        <a:t>42</a:t>
+                        <a:t>17</a:t>
                       </a:r>
                     </a:p>
                   </a:txBody>
@@ -5361,7 +5362,7 @@
                           </a:solidFill>
                           <a:latin typeface="Calibri"/>
                         </a:rPr>
-                        <a:t>Renda Fixa Duração Livre Grau de Invest.</a:t>
+                        <a:t>Renda Fixa Duração Baixa Grau de Invest.</a:t>
                       </a:r>
                     </a:p>
                   </a:txBody>
@@ -5389,73 +5390,73 @@
                   </a:txBody>
                   <a:tcPr>
                     <a:solidFill>
+                      <a:srgbClr val="6DA7EC"/>
+                    </a:solidFill>
+                  </a:tcPr>
+                </a:tc>
+                <a:tc>
+                  <a:txBody>
+                    <a:bodyPr wrap="square"/>
+                    <a:lstStyle/>
+                    <a:p>
+                      <a:r>
+                        <a:rPr sz="1000" b="0">
+                          <a:solidFill>
+                            <a:srgbClr val="0B0B0B"/>
+                          </a:solidFill>
+                          <a:latin typeface="Calibri"/>
+                        </a:rPr>
+                        <a:t>34</a:t>
+                      </a:r>
+                    </a:p>
+                  </a:txBody>
+                  <a:tcPr>
+                    <a:solidFill>
+                      <a:srgbClr val="6DA7EC"/>
+                    </a:solidFill>
+                  </a:tcPr>
+                </a:tc>
+                <a:tc>
+                  <a:txBody>
+                    <a:bodyPr wrap="square"/>
+                    <a:lstStyle/>
+                    <a:p>
+                      <a:r>
+                        <a:rPr sz="1000" b="0">
+                          <a:solidFill>
+                            <a:srgbClr val="0B0B0B"/>
+                          </a:solidFill>
+                          <a:latin typeface="Calibri"/>
+                        </a:rPr>
+                        <a:t>8</a:t>
+                      </a:r>
+                    </a:p>
+                  </a:txBody>
+                  <a:tcPr>
+                    <a:solidFill>
+                      <a:srgbClr val="CDE2FB"/>
+                    </a:solidFill>
+                  </a:tcPr>
+                </a:tc>
+                <a:tc>
+                  <a:txBody>
+                    <a:bodyPr wrap="square"/>
+                    <a:lstStyle/>
+                    <a:p>
+                      <a:r>
+                        <a:rPr sz="1000" b="0">
+                          <a:solidFill>
+                            <a:srgbClr val="0B0B0B"/>
+                          </a:solidFill>
+                          <a:latin typeface="Calibri"/>
+                        </a:rPr>
+                        <a:t>20</a:t>
+                      </a:r>
+                    </a:p>
+                  </a:txBody>
+                  <a:tcPr>
+                    <a:solidFill>
                       <a:srgbClr val="9EC5F4"/>
-                    </a:solidFill>
-                  </a:tcPr>
-                </a:tc>
-                <a:tc>
-                  <a:txBody>
-                    <a:bodyPr wrap="square"/>
-                    <a:lstStyle/>
-                    <a:p>
-                      <a:r>
-                        <a:rPr sz="1000" b="0">
-                          <a:solidFill>
-                            <a:srgbClr val="0B0B0B"/>
-                          </a:solidFill>
-                          <a:latin typeface="Calibri"/>
-                        </a:rPr>
-                        <a:t>40</a:t>
-                      </a:r>
-                    </a:p>
-                  </a:txBody>
-                  <a:tcPr>
-                    <a:solidFill>
-                      <a:srgbClr val="9EC5F4"/>
-                    </a:solidFill>
-                  </a:tcPr>
-                </a:tc>
-                <a:tc>
-                  <a:txBody>
-                    <a:bodyPr wrap="square"/>
-                    <a:lstStyle/>
-                    <a:p>
-                      <a:r>
-                        <a:rPr sz="1000" b="0">
-                          <a:solidFill>
-                            <a:srgbClr val="898781"/>
-                          </a:solidFill>
-                          <a:latin typeface="Calibri"/>
-                        </a:rPr>
-                        <a:t>-</a:t>
-                      </a:r>
-                    </a:p>
-                  </a:txBody>
-                  <a:tcPr>
-                    <a:solidFill>
-                      <a:srgbClr val="FFFFFF"/>
-                    </a:solidFill>
-                  </a:tcPr>
-                </a:tc>
-                <a:tc>
-                  <a:txBody>
-                    <a:bodyPr wrap="square"/>
-                    <a:lstStyle/>
-                    <a:p>
-                      <a:r>
-                        <a:rPr sz="1000" b="0">
-                          <a:solidFill>
-                            <a:srgbClr val="0B0B0B"/>
-                          </a:solidFill>
-                          <a:latin typeface="Calibri"/>
-                        </a:rPr>
-                        <a:t>23</a:t>
-                      </a:r>
-                    </a:p>
-                  </a:txBody>
-                  <a:tcPr>
-                    <a:solidFill>
-                      <a:srgbClr val="CDE2FB"/>
                     </a:solidFill>
                   </a:tcPr>
                 </a:tc>
@@ -5473,29 +5474,29 @@
                           </a:solidFill>
                           <a:latin typeface="Calibri"/>
                         </a:rPr>
-                        <a:t>Ações Invest. no Exterior</a:t>
-                      </a:r>
-                    </a:p>
-                  </a:txBody>
-                  <a:tcPr>
-                    <a:solidFill>
-                      <a:srgbClr val="FFFFFF"/>
-                    </a:solidFill>
-                  </a:tcPr>
-                </a:tc>
-                <a:tc>
-                  <a:txBody>
-                    <a:bodyPr wrap="square"/>
-                    <a:lstStyle/>
-                    <a:p>
-                      <a:r>
-                        <a:rPr sz="1000" b="0">
-                          <a:solidFill>
-                            <a:srgbClr val="0B0B0B"/>
-                          </a:solidFill>
-                          <a:latin typeface="Calibri"/>
-                        </a:rPr>
-                        <a:t>38</a:t>
+                        <a:t>Multimercados Estrat. Específica</a:t>
+                      </a:r>
+                    </a:p>
+                  </a:txBody>
+                  <a:tcPr>
+                    <a:solidFill>
+                      <a:srgbClr val="FFFFFF"/>
+                    </a:solidFill>
+                  </a:tcPr>
+                </a:tc>
+                <a:tc>
+                  <a:txBody>
+                    <a:bodyPr wrap="square"/>
+                    <a:lstStyle/>
+                    <a:p>
+                      <a:r>
+                        <a:rPr sz="1000" b="0">
+                          <a:solidFill>
+                            <a:srgbClr val="0B0B0B"/>
+                          </a:solidFill>
+                          <a:latin typeface="Calibri"/>
+                        </a:rPr>
+                        <a:t>27</a:t>
                       </a:r>
                     </a:p>
                   </a:txBody>
@@ -5517,7 +5518,7 @@
                           </a:solidFill>
                           <a:latin typeface="Calibri"/>
                         </a:rPr>
-                        <a:t>38</a:t>
+                        <a:t>25</a:t>
                       </a:r>
                     </a:p>
                   </a:txBody>
@@ -5539,7 +5540,7 @@
                           </a:solidFill>
                           <a:latin typeface="Calibri"/>
                         </a:rPr>
-                        <a:t>1</a:t>
+                        <a:t>12</a:t>
                       </a:r>
                     </a:p>
                   </a:txBody>
@@ -5561,13 +5562,13 @@
                           </a:solidFill>
                           <a:latin typeface="Calibri"/>
                         </a:rPr>
-                        <a:t>13</a:t>
-                      </a:r>
-                    </a:p>
-                  </a:txBody>
-                  <a:tcPr>
-                    <a:solidFill>
-                      <a:srgbClr val="CDE2FB"/>
+                        <a:t>17</a:t>
+                      </a:r>
+                    </a:p>
+                  </a:txBody>
+                  <a:tcPr>
+                    <a:solidFill>
+                      <a:srgbClr val="9EC5F4"/>
                     </a:solidFill>
                   </a:tcPr>
                 </a:tc>
@@ -5585,73 +5586,51 @@
                           </a:solidFill>
                           <a:latin typeface="Calibri"/>
                         </a:rPr>
-                        <a:t>Renda Fixa Duração Baixa Grau de Invest.</a:t>
-                      </a:r>
-                    </a:p>
-                  </a:txBody>
-                  <a:tcPr>
-                    <a:solidFill>
-                      <a:srgbClr val="FFFFFF"/>
-                    </a:solidFill>
-                  </a:tcPr>
-                </a:tc>
-                <a:tc>
-                  <a:txBody>
-                    <a:bodyPr wrap="square"/>
-                    <a:lstStyle/>
-                    <a:p>
-                      <a:r>
-                        <a:rPr sz="1000" b="0">
-                          <a:solidFill>
-                            <a:srgbClr val="0B0B0B"/>
-                          </a:solidFill>
-                          <a:latin typeface="Calibri"/>
-                        </a:rPr>
-                        <a:t>30</a:t>
-                      </a:r>
-                    </a:p>
-                  </a:txBody>
-                  <a:tcPr>
-                    <a:solidFill>
-                      <a:srgbClr val="9EC5F4"/>
-                    </a:solidFill>
-                  </a:tcPr>
-                </a:tc>
-                <a:tc>
-                  <a:txBody>
-                    <a:bodyPr wrap="square"/>
-                    <a:lstStyle/>
-                    <a:p>
-                      <a:r>
-                        <a:rPr sz="1000" b="0">
-                          <a:solidFill>
-                            <a:srgbClr val="0B0B0B"/>
-                          </a:solidFill>
-                          <a:latin typeface="Calibri"/>
-                        </a:rPr>
-                        <a:t>34</a:t>
-                      </a:r>
-                    </a:p>
-                  </a:txBody>
-                  <a:tcPr>
-                    <a:solidFill>
-                      <a:srgbClr val="9EC5F4"/>
-                    </a:solidFill>
-                  </a:tcPr>
-                </a:tc>
-                <a:tc>
-                  <a:txBody>
-                    <a:bodyPr wrap="square"/>
-                    <a:lstStyle/>
-                    <a:p>
-                      <a:r>
-                        <a:rPr sz="1000" b="0">
-                          <a:solidFill>
-                            <a:srgbClr val="0B0B0B"/>
-                          </a:solidFill>
-                          <a:latin typeface="Calibri"/>
-                        </a:rPr>
-                        <a:t>1</a:t>
+                        <a:t>Estruturado (sem classificacao ANBIMA)</a:t>
+                      </a:r>
+                    </a:p>
+                  </a:txBody>
+                  <a:tcPr>
+                    <a:solidFill>
+                      <a:srgbClr val="FFFFFF"/>
+                    </a:solidFill>
+                  </a:tcPr>
+                </a:tc>
+                <a:tc>
+                  <a:txBody>
+                    <a:bodyPr wrap="square"/>
+                    <a:lstStyle/>
+                    <a:p>
+                      <a:r>
+                        <a:rPr sz="1000" b="0">
+                          <a:solidFill>
+                            <a:srgbClr val="0B0B0B"/>
+                          </a:solidFill>
+                          <a:latin typeface="Calibri"/>
+                        </a:rPr>
+                        <a:t>43</a:t>
+                      </a:r>
+                    </a:p>
+                  </a:txBody>
+                  <a:tcPr>
+                    <a:solidFill>
+                      <a:srgbClr val="6DA7EC"/>
+                    </a:solidFill>
+                  </a:tcPr>
+                </a:tc>
+                <a:tc>
+                  <a:txBody>
+                    <a:bodyPr wrap="square"/>
+                    <a:lstStyle/>
+                    <a:p>
+                      <a:r>
+                        <a:rPr sz="1000" b="0">
+                          <a:solidFill>
+                            <a:srgbClr val="0B0B0B"/>
+                          </a:solidFill>
+                          <a:latin typeface="Calibri"/>
+                        </a:rPr>
+                        <a:t>3</a:t>
                       </a:r>
                     </a:p>
                   </a:txBody>
@@ -5673,7 +5652,29 @@
                           </a:solidFill>
                           <a:latin typeface="Calibri"/>
                         </a:rPr>
-                        <a:t>19</a:t>
+                        <a:t>4</a:t>
+                      </a:r>
+                    </a:p>
+                  </a:txBody>
+                  <a:tcPr>
+                    <a:solidFill>
+                      <a:srgbClr val="CDE2FB"/>
+                    </a:solidFill>
+                  </a:tcPr>
+                </a:tc>
+                <a:tc>
+                  <a:txBody>
+                    <a:bodyPr wrap="square"/>
+                    <a:lstStyle/>
+                    <a:p>
+                      <a:r>
+                        <a:rPr sz="1000" b="0">
+                          <a:solidFill>
+                            <a:srgbClr val="0B0B0B"/>
+                          </a:solidFill>
+                          <a:latin typeface="Calibri"/>
+                        </a:rPr>
+                        <a:t>2</a:t>
                       </a:r>
                     </a:p>
                   </a:txBody>
@@ -5697,29 +5698,29 @@
                           </a:solidFill>
                           <a:latin typeface="Calibri"/>
                         </a:rPr>
-                        <a:t>Multimercados Invest. no Exterior</a:t>
-                      </a:r>
-                    </a:p>
-                  </a:txBody>
-                  <a:tcPr>
-                    <a:solidFill>
-                      <a:srgbClr val="FFFFFF"/>
-                    </a:solidFill>
-                  </a:tcPr>
-                </a:tc>
-                <a:tc>
-                  <a:txBody>
-                    <a:bodyPr wrap="square"/>
-                    <a:lstStyle/>
-                    <a:p>
-                      <a:r>
-                        <a:rPr sz="1000" b="0">
-                          <a:solidFill>
-                            <a:srgbClr val="0B0B0B"/>
-                          </a:solidFill>
-                          <a:latin typeface="Calibri"/>
-                        </a:rPr>
-                        <a:t>30</a:t>
+                        <a:t>Multimercados L/S - Direcional</a:t>
+                      </a:r>
+                    </a:p>
+                  </a:txBody>
+                  <a:tcPr>
+                    <a:solidFill>
+                      <a:srgbClr val="FFFFFF"/>
+                    </a:solidFill>
+                  </a:tcPr>
+                </a:tc>
+                <a:tc>
+                  <a:txBody>
+                    <a:bodyPr wrap="square"/>
+                    <a:lstStyle/>
+                    <a:p>
+                      <a:r>
+                        <a:rPr sz="1000" b="0">
+                          <a:solidFill>
+                            <a:srgbClr val="0B0B0B"/>
+                          </a:solidFill>
+                          <a:latin typeface="Calibri"/>
+                        </a:rPr>
+                        <a:t>18</a:t>
                       </a:r>
                     </a:p>
                   </a:txBody>
@@ -5741,29 +5742,7 @@
                           </a:solidFill>
                           <a:latin typeface="Calibri"/>
                         </a:rPr>
-                        <a:t>41</a:t>
-                      </a:r>
-                    </a:p>
-                  </a:txBody>
-                  <a:tcPr>
-                    <a:solidFill>
-                      <a:srgbClr val="9EC5F4"/>
-                    </a:solidFill>
-                  </a:tcPr>
-                </a:tc>
-                <a:tc>
-                  <a:txBody>
-                    <a:bodyPr wrap="square"/>
-                    <a:lstStyle/>
-                    <a:p>
-                      <a:r>
-                        <a:rPr sz="1000" b="0">
-                          <a:solidFill>
-                            <a:srgbClr val="0B0B0B"/>
-                          </a:solidFill>
-                          <a:latin typeface="Calibri"/>
-                        </a:rPr>
-                        <a:t>1</a:t>
+                        <a:t>13</a:t>
                       </a:r>
                     </a:p>
                   </a:txBody>
@@ -5785,7 +5764,29 @@
                           </a:solidFill>
                           <a:latin typeface="Calibri"/>
                         </a:rPr>
-                        <a:t>11</a:t>
+                        <a:t>9</a:t>
+                      </a:r>
+                    </a:p>
+                  </a:txBody>
+                  <a:tcPr>
+                    <a:solidFill>
+                      <a:srgbClr val="CDE2FB"/>
+                    </a:solidFill>
+                  </a:tcPr>
+                </a:tc>
+                <a:tc>
+                  <a:txBody>
+                    <a:bodyPr wrap="square"/>
+                    <a:lstStyle/>
+                    <a:p>
+                      <a:r>
+                        <a:rPr sz="1000" b="0">
+                          <a:solidFill>
+                            <a:srgbClr val="0B0B0B"/>
+                          </a:solidFill>
+                          <a:latin typeface="Calibri"/>
+                        </a:rPr>
+                        <a:t>10</a:t>
                       </a:r>
                     </a:p>
                   </a:txBody>
@@ -5809,95 +5810,95 @@
                           </a:solidFill>
                           <a:latin typeface="Calibri"/>
                         </a:rPr>
-                        <a:t>Sem classificacao</a:t>
-                      </a:r>
-                    </a:p>
-                  </a:txBody>
-                  <a:tcPr>
-                    <a:solidFill>
-                      <a:srgbClr val="FFFFFF"/>
-                    </a:solidFill>
-                  </a:tcPr>
-                </a:tc>
-                <a:tc>
-                  <a:txBody>
-                    <a:bodyPr wrap="square"/>
-                    <a:lstStyle/>
-                    <a:p>
-                      <a:r>
-                        <a:rPr sz="1000" b="0">
-                          <a:solidFill>
-                            <a:srgbClr val="0B0B0B"/>
-                          </a:solidFill>
-                          <a:latin typeface="Calibri"/>
-                        </a:rPr>
-                        <a:t>45</a:t>
-                      </a:r>
-                    </a:p>
-                  </a:txBody>
-                  <a:tcPr>
-                    <a:solidFill>
-                      <a:srgbClr val="9EC5F4"/>
-                    </a:solidFill>
-                  </a:tcPr>
-                </a:tc>
-                <a:tc>
-                  <a:txBody>
-                    <a:bodyPr wrap="square"/>
-                    <a:lstStyle/>
-                    <a:p>
-                      <a:r>
-                        <a:rPr sz="1000" b="0">
-                          <a:solidFill>
-                            <a:srgbClr val="898781"/>
-                          </a:solidFill>
-                          <a:latin typeface="Calibri"/>
-                        </a:rPr>
-                        <a:t>-</a:t>
-                      </a:r>
-                    </a:p>
-                  </a:txBody>
-                  <a:tcPr>
-                    <a:solidFill>
-                      <a:srgbClr val="FFFFFF"/>
-                    </a:solidFill>
-                  </a:tcPr>
-                </a:tc>
-                <a:tc>
-                  <a:txBody>
-                    <a:bodyPr wrap="square"/>
-                    <a:lstStyle/>
-                    <a:p>
-                      <a:r>
-                        <a:rPr sz="1000" b="0">
-                          <a:solidFill>
-                            <a:srgbClr val="0B0B0B"/>
-                          </a:solidFill>
-                          <a:latin typeface="Calibri"/>
-                        </a:rPr>
-                        <a:t>26</a:t>
-                      </a:r>
-                    </a:p>
-                  </a:txBody>
-                  <a:tcPr>
-                    <a:solidFill>
-                      <a:srgbClr val="9EC5F4"/>
-                    </a:solidFill>
-                  </a:tcPr>
-                </a:tc>
-                <a:tc>
-                  <a:txBody>
-                    <a:bodyPr wrap="square"/>
-                    <a:lstStyle/>
-                    <a:p>
-                      <a:r>
-                        <a:rPr sz="1000" b="0">
-                          <a:solidFill>
-                            <a:srgbClr val="0B0B0B"/>
-                          </a:solidFill>
-                          <a:latin typeface="Calibri"/>
-                        </a:rPr>
-                        <a:t>11</a:t>
+                        <a:t>Multimercados Dinâmico</a:t>
+                      </a:r>
+                    </a:p>
+                  </a:txBody>
+                  <a:tcPr>
+                    <a:solidFill>
+                      <a:srgbClr val="FFFFFF"/>
+                    </a:solidFill>
+                  </a:tcPr>
+                </a:tc>
+                <a:tc>
+                  <a:txBody>
+                    <a:bodyPr wrap="square"/>
+                    <a:lstStyle/>
+                    <a:p>
+                      <a:r>
+                        <a:rPr sz="1000" b="0">
+                          <a:solidFill>
+                            <a:srgbClr val="0B0B0B"/>
+                          </a:solidFill>
+                          <a:latin typeface="Calibri"/>
+                        </a:rPr>
+                        <a:t>13</a:t>
+                      </a:r>
+                    </a:p>
+                  </a:txBody>
+                  <a:tcPr>
+                    <a:solidFill>
+                      <a:srgbClr val="CDE2FB"/>
+                    </a:solidFill>
+                  </a:tcPr>
+                </a:tc>
+                <a:tc>
+                  <a:txBody>
+                    <a:bodyPr wrap="square"/>
+                    <a:lstStyle/>
+                    <a:p>
+                      <a:r>
+                        <a:rPr sz="1000" b="0">
+                          <a:solidFill>
+                            <a:srgbClr val="0B0B0B"/>
+                          </a:solidFill>
+                          <a:latin typeface="Calibri"/>
+                        </a:rPr>
+                        <a:t>8</a:t>
+                      </a:r>
+                    </a:p>
+                  </a:txBody>
+                  <a:tcPr>
+                    <a:solidFill>
+                      <a:srgbClr val="CDE2FB"/>
+                    </a:solidFill>
+                  </a:tcPr>
+                </a:tc>
+                <a:tc>
+                  <a:txBody>
+                    <a:bodyPr wrap="square"/>
+                    <a:lstStyle/>
+                    <a:p>
+                      <a:r>
+                        <a:rPr sz="1000" b="0">
+                          <a:solidFill>
+                            <a:srgbClr val="0B0B0B"/>
+                          </a:solidFill>
+                          <a:latin typeface="Calibri"/>
+                        </a:rPr>
+                        <a:t>4</a:t>
+                      </a:r>
+                    </a:p>
+                  </a:txBody>
+                  <a:tcPr>
+                    <a:solidFill>
+                      <a:srgbClr val="CDE2FB"/>
+                    </a:solidFill>
+                  </a:tcPr>
+                </a:tc>
+                <a:tc>
+                  <a:txBody>
+                    <a:bodyPr wrap="square"/>
+                    <a:lstStyle/>
+                    <a:p>
+                      <a:r>
+                        <a:rPr sz="1000" b="0">
+                          <a:solidFill>
+                            <a:srgbClr val="0B0B0B"/>
+                          </a:solidFill>
+                          <a:latin typeface="Calibri"/>
+                        </a:rPr>
+                        <a:t>7</a:t>
                       </a:r>
                     </a:p>
                   </a:txBody>
@@ -7140,7 +7141,7 @@
                           </a:solidFill>
                           <a:latin typeface="Calibri"/>
                         </a:rPr>
-                        <a:t>Direitos Creditórios</a:t>
+                        <a:t>Renda Fixa Duração Livre Crédito Livre</a:t>
                       </a:r>
                     </a:p>
                   </a:txBody>
@@ -7740,51 +7741,51 @@
                           </a:solidFill>
                           <a:latin typeface="Calibri"/>
                         </a:rPr>
-                        <a:t>84</a:t>
-                      </a:r>
-                    </a:p>
-                  </a:txBody>
-                  <a:tcPr>
-                    <a:solidFill>
-                      <a:srgbClr val="FFFFFF"/>
-                    </a:solidFill>
-                  </a:tcPr>
-                </a:tc>
-                <a:tc>
-                  <a:txBody>
-                    <a:bodyPr wrap="square"/>
-                    <a:lstStyle/>
-                    <a:p>
-                      <a:r>
-                        <a:rPr sz="1000" b="0">
-                          <a:solidFill>
-                            <a:srgbClr val="0B0B0B"/>
-                          </a:solidFill>
-                          <a:latin typeface="Calibri"/>
-                        </a:rPr>
-                        <a:t>BTG Pactual (109)</a:t>
-                      </a:r>
-                    </a:p>
-                  </a:txBody>
-                  <a:tcPr>
-                    <a:solidFill>
-                      <a:srgbClr val="FFFFFF"/>
-                    </a:solidFill>
-                  </a:tcPr>
-                </a:tc>
-                <a:tc>
-                  <a:txBody>
-                    <a:bodyPr wrap="square"/>
-                    <a:lstStyle/>
-                    <a:p>
-                      <a:r>
-                        <a:rPr sz="1000" b="0">
-                          <a:solidFill>
-                            <a:srgbClr val="0B0B0B"/>
-                          </a:solidFill>
-                          <a:latin typeface="Calibri"/>
-                        </a:rPr>
-                        <a:t>102</a:t>
+                        <a:t>93</a:t>
+                      </a:r>
+                    </a:p>
+                  </a:txBody>
+                  <a:tcPr>
+                    <a:solidFill>
+                      <a:srgbClr val="FFFFFF"/>
+                    </a:solidFill>
+                  </a:tcPr>
+                </a:tc>
+                <a:tc>
+                  <a:txBody>
+                    <a:bodyPr wrap="square"/>
+                    <a:lstStyle/>
+                    <a:p>
+                      <a:r>
+                        <a:rPr sz="1000" b="0">
+                          <a:solidFill>
+                            <a:srgbClr val="0B0B0B"/>
+                          </a:solidFill>
+                          <a:latin typeface="Calibri"/>
+                        </a:rPr>
+                        <a:t>BTG Pactual (114)</a:t>
+                      </a:r>
+                    </a:p>
+                  </a:txBody>
+                  <a:tcPr>
+                    <a:solidFill>
+                      <a:srgbClr val="FFFFFF"/>
+                    </a:solidFill>
+                  </a:tcPr>
+                </a:tc>
+                <a:tc>
+                  <a:txBody>
+                    <a:bodyPr wrap="square"/>
+                    <a:lstStyle/>
+                    <a:p>
+                      <a:r>
+                        <a:rPr sz="1000" b="0">
+                          <a:solidFill>
+                            <a:srgbClr val="0B0B0B"/>
+                          </a:solidFill>
+                          <a:latin typeface="Calibri"/>
+                        </a:rPr>
+                        <a:t>120</a:t>
                       </a:r>
                     </a:p>
                   </a:txBody>
@@ -7830,51 +7831,51 @@
                           </a:solidFill>
                           <a:latin typeface="Calibri"/>
                         </a:rPr>
-                        <a:t>76</a:t>
-                      </a:r>
-                    </a:p>
-                  </a:txBody>
-                  <a:tcPr>
-                    <a:solidFill>
-                      <a:srgbClr val="FFFFFF"/>
-                    </a:solidFill>
-                  </a:tcPr>
-                </a:tc>
-                <a:tc>
-                  <a:txBody>
-                    <a:bodyPr wrap="square"/>
-                    <a:lstStyle/>
-                    <a:p>
-                      <a:r>
-                        <a:rPr sz="1000" b="0">
-                          <a:solidFill>
-                            <a:srgbClr val="0B0B0B"/>
-                          </a:solidFill>
-                          <a:latin typeface="Calibri"/>
-                        </a:rPr>
-                        <a:t>BTG Pactual (91)</a:t>
-                      </a:r>
-                    </a:p>
-                  </a:txBody>
-                  <a:tcPr>
-                    <a:solidFill>
-                      <a:srgbClr val="FFFFFF"/>
-                    </a:solidFill>
-                  </a:tcPr>
-                </a:tc>
-                <a:tc>
-                  <a:txBody>
-                    <a:bodyPr wrap="square"/>
-                    <a:lstStyle/>
-                    <a:p>
-                      <a:r>
-                        <a:rPr sz="1000" b="0">
-                          <a:solidFill>
-                            <a:srgbClr val="0B0B0B"/>
-                          </a:solidFill>
-                          <a:latin typeface="Calibri"/>
-                        </a:rPr>
-                        <a:t>95</a:t>
+                        <a:t>78</a:t>
+                      </a:r>
+                    </a:p>
+                  </a:txBody>
+                  <a:tcPr>
+                    <a:solidFill>
+                      <a:srgbClr val="FFFFFF"/>
+                    </a:solidFill>
+                  </a:tcPr>
+                </a:tc>
+                <a:tc>
+                  <a:txBody>
+                    <a:bodyPr wrap="square"/>
+                    <a:lstStyle/>
+                    <a:p>
+                      <a:r>
+                        <a:rPr sz="1000" b="0">
+                          <a:solidFill>
+                            <a:srgbClr val="0B0B0B"/>
+                          </a:solidFill>
+                          <a:latin typeface="Calibri"/>
+                        </a:rPr>
+                        <a:t>BTG Pactual (99)</a:t>
+                      </a:r>
+                    </a:p>
+                  </a:txBody>
+                  <a:tcPr>
+                    <a:solidFill>
+                      <a:srgbClr val="FFFFFF"/>
+                    </a:solidFill>
+                  </a:tcPr>
+                </a:tc>
+                <a:tc>
+                  <a:txBody>
+                    <a:bodyPr wrap="square"/>
+                    <a:lstStyle/>
+                    <a:p>
+                      <a:r>
+                        <a:rPr sz="1000" b="0">
+                          <a:solidFill>
+                            <a:srgbClr val="0B0B0B"/>
+                          </a:solidFill>
+                          <a:latin typeface="Calibri"/>
+                        </a:rPr>
+                        <a:t>112</a:t>
                       </a:r>
                     </a:p>
                   </a:txBody>
@@ -7920,51 +7921,51 @@
                           </a:solidFill>
                           <a:latin typeface="Calibri"/>
                         </a:rPr>
-                        <a:t>96</a:t>
-                      </a:r>
-                    </a:p>
-                  </a:txBody>
-                  <a:tcPr>
-                    <a:solidFill>
-                      <a:srgbClr val="FFFFFF"/>
-                    </a:solidFill>
-                  </a:tcPr>
-                </a:tc>
-                <a:tc>
-                  <a:txBody>
-                    <a:bodyPr wrap="square"/>
-                    <a:lstStyle/>
-                    <a:p>
-                      <a:r>
-                        <a:rPr sz="1000" b="0">
-                          <a:solidFill>
-                            <a:srgbClr val="0B0B0B"/>
-                          </a:solidFill>
-                          <a:latin typeface="Calibri"/>
-                        </a:rPr>
-                        <a:t>BTG Pactual (101)</a:t>
-                      </a:r>
-                    </a:p>
-                  </a:txBody>
-                  <a:tcPr>
-                    <a:solidFill>
-                      <a:srgbClr val="FFFFFF"/>
-                    </a:solidFill>
-                  </a:tcPr>
-                </a:tc>
-                <a:tc>
-                  <a:txBody>
-                    <a:bodyPr wrap="square"/>
-                    <a:lstStyle/>
-                    <a:p>
-                      <a:r>
-                        <a:rPr sz="1000" b="0">
-                          <a:solidFill>
-                            <a:srgbClr val="0B0B0B"/>
-                          </a:solidFill>
-                          <a:latin typeface="Calibri"/>
-                        </a:rPr>
-                        <a:t>60</a:t>
+                        <a:t>104</a:t>
+                      </a:r>
+                    </a:p>
+                  </a:txBody>
+                  <a:tcPr>
+                    <a:solidFill>
+                      <a:srgbClr val="FFFFFF"/>
+                    </a:solidFill>
+                  </a:tcPr>
+                </a:tc>
+                <a:tc>
+                  <a:txBody>
+                    <a:bodyPr wrap="square"/>
+                    <a:lstStyle/>
+                    <a:p>
+                      <a:r>
+                        <a:rPr sz="1000" b="0">
+                          <a:solidFill>
+                            <a:srgbClr val="0B0B0B"/>
+                          </a:solidFill>
+                          <a:latin typeface="Calibri"/>
+                        </a:rPr>
+                        <a:t>BTG Pactual (105)</a:t>
+                      </a:r>
+                    </a:p>
+                  </a:txBody>
+                  <a:tcPr>
+                    <a:solidFill>
+                      <a:srgbClr val="FFFFFF"/>
+                    </a:solidFill>
+                  </a:tcPr>
+                </a:tc>
+                <a:tc>
+                  <a:txBody>
+                    <a:bodyPr wrap="square"/>
+                    <a:lstStyle/>
+                    <a:p>
+                      <a:r>
+                        <a:rPr sz="1000" b="0">
+                          <a:solidFill>
+                            <a:srgbClr val="0B0B0B"/>
+                          </a:solidFill>
+                          <a:latin typeface="Calibri"/>
+                        </a:rPr>
+                        <a:t>63</a:t>
                       </a:r>
                     </a:p>
                   </a:txBody>
@@ -7988,73 +7989,73 @@
                           </a:solidFill>
                           <a:latin typeface="Calibri"/>
                         </a:rPr>
-                        <a:t>Multimercado</a:t>
-                      </a:r>
-                    </a:p>
-                  </a:txBody>
-                  <a:tcPr>
-                    <a:solidFill>
-                      <a:srgbClr val="FFFFFF"/>
-                    </a:solidFill>
-                  </a:tcPr>
-                </a:tc>
-                <a:tc>
-                  <a:txBody>
-                    <a:bodyPr wrap="square"/>
-                    <a:lstStyle/>
-                    <a:p>
-                      <a:r>
-                        <a:rPr sz="1000" b="0">
-                          <a:solidFill>
-                            <a:srgbClr val="0B0B0B"/>
-                          </a:solidFill>
-                          <a:latin typeface="Calibri"/>
-                        </a:rPr>
-                        <a:t>9</a:t>
-                      </a:r>
-                    </a:p>
-                  </a:txBody>
-                  <a:tcPr>
-                    <a:solidFill>
-                      <a:srgbClr val="FFFFFF"/>
-                    </a:solidFill>
-                  </a:tcPr>
-                </a:tc>
-                <a:tc>
-                  <a:txBody>
-                    <a:bodyPr wrap="square"/>
-                    <a:lstStyle/>
-                    <a:p>
-                      <a:r>
-                        <a:rPr sz="1000" b="0">
-                          <a:solidFill>
-                            <a:srgbClr val="0B0B0B"/>
-                          </a:solidFill>
-                          <a:latin typeface="Calibri"/>
-                        </a:rPr>
-                        <a:t>Itau (Ion) (169)</a:t>
-                      </a:r>
-                    </a:p>
-                  </a:txBody>
-                  <a:tcPr>
-                    <a:solidFill>
-                      <a:srgbClr val="FFFFFF"/>
-                    </a:solidFill>
-                  </a:tcPr>
-                </a:tc>
-                <a:tc>
-                  <a:txBody>
-                    <a:bodyPr wrap="square"/>
-                    <a:lstStyle/>
-                    <a:p>
-                      <a:r>
-                        <a:rPr sz="1000" b="0">
-                          <a:solidFill>
-                            <a:srgbClr val="0B0B0B"/>
-                          </a:solidFill>
-                          <a:latin typeface="Calibri"/>
-                        </a:rPr>
-                        <a:t>51</a:t>
+                        <a:t>Multimercados Macro</a:t>
+                      </a:r>
+                    </a:p>
+                  </a:txBody>
+                  <a:tcPr>
+                    <a:solidFill>
+                      <a:srgbClr val="FFFFFF"/>
+                    </a:solidFill>
+                  </a:tcPr>
+                </a:tc>
+                <a:tc>
+                  <a:txBody>
+                    <a:bodyPr wrap="square"/>
+                    <a:lstStyle/>
+                    <a:p>
+                      <a:r>
+                        <a:rPr sz="1000" b="0">
+                          <a:solidFill>
+                            <a:srgbClr val="0B0B0B"/>
+                          </a:solidFill>
+                          <a:latin typeface="Calibri"/>
+                        </a:rPr>
+                        <a:t>44</a:t>
+                      </a:r>
+                    </a:p>
+                  </a:txBody>
+                  <a:tcPr>
+                    <a:solidFill>
+                      <a:srgbClr val="FFFFFF"/>
+                    </a:solidFill>
+                  </a:tcPr>
+                </a:tc>
+                <a:tc>
+                  <a:txBody>
+                    <a:bodyPr wrap="square"/>
+                    <a:lstStyle/>
+                    <a:p>
+                      <a:r>
+                        <a:rPr sz="1000" b="0">
+                          <a:solidFill>
+                            <a:srgbClr val="0B0B0B"/>
+                          </a:solidFill>
+                          <a:latin typeface="Calibri"/>
+                        </a:rPr>
+                        <a:t>Banco Inter (53)</a:t>
+                      </a:r>
+                    </a:p>
+                  </a:txBody>
+                  <a:tcPr>
+                    <a:solidFill>
+                      <a:srgbClr val="FFFFFF"/>
+                    </a:solidFill>
+                  </a:tcPr>
+                </a:tc>
+                <a:tc>
+                  <a:txBody>
+                    <a:bodyPr wrap="square"/>
+                    <a:lstStyle/>
+                    <a:p>
+                      <a:r>
+                        <a:rPr sz="1000" b="0">
+                          <a:solidFill>
+                            <a:srgbClr val="0B0B0B"/>
+                          </a:solidFill>
+                          <a:latin typeface="Calibri"/>
+                        </a:rPr>
+                        <a:t>52</a:t>
                       </a:r>
                     </a:p>
                   </a:txBody>
@@ -8078,73 +8079,73 @@
                           </a:solidFill>
                           <a:latin typeface="Calibri"/>
                         </a:rPr>
-                        <a:t>Multimercados Macro</a:t>
-                      </a:r>
-                    </a:p>
-                  </a:txBody>
-                  <a:tcPr>
-                    <a:solidFill>
-                      <a:srgbClr val="FFFFFF"/>
-                    </a:solidFill>
-                  </a:tcPr>
-                </a:tc>
-                <a:tc>
-                  <a:txBody>
-                    <a:bodyPr wrap="square"/>
-                    <a:lstStyle/>
-                    <a:p>
-                      <a:r>
-                        <a:rPr sz="1000" b="0">
-                          <a:solidFill>
-                            <a:srgbClr val="0B0B0B"/>
-                          </a:solidFill>
-                          <a:latin typeface="Calibri"/>
-                        </a:rPr>
-                        <a:t>40</a:t>
-                      </a:r>
-                    </a:p>
-                  </a:txBody>
-                  <a:tcPr>
-                    <a:solidFill>
-                      <a:srgbClr val="FFFFFF"/>
-                    </a:solidFill>
-                  </a:tcPr>
-                </a:tc>
-                <a:tc>
-                  <a:txBody>
-                    <a:bodyPr wrap="square"/>
-                    <a:lstStyle/>
-                    <a:p>
-                      <a:r>
-                        <a:rPr sz="1000" b="0">
-                          <a:solidFill>
-                            <a:srgbClr val="0B0B0B"/>
-                          </a:solidFill>
-                          <a:latin typeface="Calibri"/>
-                        </a:rPr>
-                        <a:t>Banco Inter (42)</a:t>
-                      </a:r>
-                    </a:p>
-                  </a:txBody>
-                  <a:tcPr>
-                    <a:solidFill>
-                      <a:srgbClr val="FFFFFF"/>
-                    </a:solidFill>
-                  </a:tcPr>
-                </a:tc>
-                <a:tc>
-                  <a:txBody>
-                    <a:bodyPr wrap="square"/>
-                    <a:lstStyle/>
-                    <a:p>
-                      <a:r>
-                        <a:rPr sz="1000" b="0">
-                          <a:solidFill>
-                            <a:srgbClr val="0B0B0B"/>
-                          </a:solidFill>
-                          <a:latin typeface="Calibri"/>
-                        </a:rPr>
-                        <a:t>41</a:t>
+                        <a:t>Multimercados Invest. no Exterior</a:t>
+                      </a:r>
+                    </a:p>
+                  </a:txBody>
+                  <a:tcPr>
+                    <a:solidFill>
+                      <a:srgbClr val="FFFFFF"/>
+                    </a:solidFill>
+                  </a:tcPr>
+                </a:tc>
+                <a:tc>
+                  <a:txBody>
+                    <a:bodyPr wrap="square"/>
+                    <a:lstStyle/>
+                    <a:p>
+                      <a:r>
+                        <a:rPr sz="1000" b="0">
+                          <a:solidFill>
+                            <a:srgbClr val="0B0B0B"/>
+                          </a:solidFill>
+                          <a:latin typeface="Calibri"/>
+                        </a:rPr>
+                        <a:t>31</a:t>
+                      </a:r>
+                    </a:p>
+                  </a:txBody>
+                  <a:tcPr>
+                    <a:solidFill>
+                      <a:srgbClr val="FFFFFF"/>
+                    </a:solidFill>
+                  </a:tcPr>
+                </a:tc>
+                <a:tc>
+                  <a:txBody>
+                    <a:bodyPr wrap="square"/>
+                    <a:lstStyle/>
+                    <a:p>
+                      <a:r>
+                        <a:rPr sz="1000" b="0">
+                          <a:solidFill>
+                            <a:srgbClr val="0B0B0B"/>
+                          </a:solidFill>
+                          <a:latin typeface="Calibri"/>
+                        </a:rPr>
+                        <a:t>BTG Pactual (45)</a:t>
+                      </a:r>
+                    </a:p>
+                  </a:txBody>
+                  <a:tcPr>
+                    <a:solidFill>
+                      <a:srgbClr val="FFFFFF"/>
+                    </a:solidFill>
+                  </a:tcPr>
+                </a:tc>
+                <a:tc>
+                  <a:txBody>
+                    <a:bodyPr wrap="square"/>
+                    <a:lstStyle/>
+                    <a:p>
+                      <a:r>
+                        <a:rPr sz="1000" b="0">
+                          <a:solidFill>
+                            <a:srgbClr val="0B0B0B"/>
+                          </a:solidFill>
+                          <a:latin typeface="Calibri"/>
+                        </a:rPr>
+                        <a:t>48</a:t>
                       </a:r>
                     </a:p>
                   </a:txBody>
@@ -8600,7 +8601,7 @@
         <p:spPr>
           <a:xfrm>
             <a:off x="2743200" y="2103120"/>
-            <a:ext cx="1251626" cy="274320"/>
+            <a:ext cx="1239783" cy="274320"/>
           </a:xfrm>
           <a:prstGeom prst="rect">
             <a:avLst/>
@@ -8643,7 +8644,7 @@
         </p:nvSpPr>
         <p:spPr>
           <a:xfrm>
-            <a:off x="4022258" y="2103120"/>
+            <a:off x="4010415" y="2103120"/>
             <a:ext cx="6249428" cy="274320"/>
           </a:xfrm>
           <a:prstGeom prst="rect">
@@ -8687,8 +8688,8 @@
         </p:nvSpPr>
         <p:spPr>
           <a:xfrm>
-            <a:off x="10299118" y="2103120"/>
-            <a:ext cx="280489" cy="274320"/>
+            <a:off x="10287275" y="2103120"/>
+            <a:ext cx="292332" cy="274320"/>
           </a:xfrm>
           <a:prstGeom prst="rect">
             <a:avLst/>
@@ -8800,7 +8801,7 @@
         <p:spPr>
           <a:xfrm>
             <a:off x="2743200" y="2670048"/>
-            <a:ext cx="1358214" cy="274320"/>
+            <a:ext cx="1381900" cy="274320"/>
           </a:xfrm>
           <a:prstGeom prst="rect">
             <a:avLst/>
@@ -8843,8 +8844,8 @@
         </p:nvSpPr>
         <p:spPr>
           <a:xfrm>
-            <a:off x="4128846" y="2670048"/>
-            <a:ext cx="6095467" cy="274320"/>
+            <a:off x="4152532" y="2670048"/>
+            <a:ext cx="6071781" cy="274320"/>
           </a:xfrm>
           <a:prstGeom prst="rect">
             <a:avLst/>
@@ -8956,7 +8957,7 @@
         <p:spPr>
           <a:xfrm>
             <a:off x="2743200" y="3236976"/>
-            <a:ext cx="1879312" cy="274320"/>
+            <a:ext cx="1867469" cy="274320"/>
           </a:xfrm>
           <a:prstGeom prst="rect">
             <a:avLst/>
@@ -8999,8 +9000,8 @@
         </p:nvSpPr>
         <p:spPr>
           <a:xfrm>
-            <a:off x="4649944" y="3236976"/>
-            <a:ext cx="3489978" cy="274320"/>
+            <a:off x="4638101" y="3236976"/>
+            <a:ext cx="3501821" cy="274320"/>
           </a:xfrm>
           <a:prstGeom prst="rect">
             <a:avLst/>
@@ -10956,6 +10957,1263 @@
                 </a:solidFill>
                 <a:latin typeface="Calibri"/>
               </a:rPr>
+              <a:t>Radar CVM - visao antecipada</a:t>
+            </a:r>
+          </a:p>
+        </p:txBody>
+      </p:sp>
+      <p:sp>
+        <p:nvSpPr>
+          <p:cNvPr id="4" name="TextBox 3"/>
+          <p:cNvSpPr txBox="1"/>
+          <p:nvPr/>
+        </p:nvSpPr>
+        <p:spPr>
+          <a:xfrm>
+            <a:off x="548640" y="868680"/>
+            <a:ext cx="11064240" cy="457200"/>
+          </a:xfrm>
+          <a:prstGeom prst="rect">
+            <a:avLst/>
+          </a:prstGeom>
+          <a:noFill/>
+        </p:spPr>
+        <p:txBody>
+          <a:bodyPr wrap="square">
+            <a:spAutoFit/>
+          </a:bodyPr>
+          <a:lstStyle/>
+          <a:p>
+            <a:r>
+              <a:rPr sz="1200" b="0">
+                <a:solidFill>
+                  <a:srgbClr val="52514E"/>
+                </a:solidFill>
+                <a:latin typeface="Calibri"/>
+              </a:rPr>
+              <a:t>Fundos registrados por gestoras ligadas as casas; pre-operacional = registrado e ainda nao lancado</a:t>
+            </a:r>
+          </a:p>
+        </p:txBody>
+      </p:sp>
+      <p:graphicFrame>
+        <p:nvGraphicFramePr>
+          <p:cNvPr id="5" name="Table 4"/>
+          <p:cNvGraphicFramePr>
+            <a:graphicFrameLocks noGrp="1"/>
+          </p:cNvGraphicFramePr>
+          <p:nvPr/>
+        </p:nvGraphicFramePr>
+        <p:xfrm>
+          <a:off x="548640" y="1463040"/>
+          <a:ext cx="6857998" cy="1755648"/>
+        </p:xfrm>
+        <a:graphic>
+          <a:graphicData uri="http://schemas.openxmlformats.org/drawingml/2006/table">
+            <a:tbl>
+              <a:tblPr>
+                <a:tableStyleId>{5C22544A-7EE6-4342-B048-85BDC9FD1C3A}</a:tableStyleId>
+              </a:tblPr>
+              <a:tblGrid>
+                <a:gridCol w="3117272"/>
+                <a:gridCol w="1870363"/>
+                <a:gridCol w="1870363"/>
+              </a:tblGrid>
+              <a:tr h="292608">
+                <a:tc>
+                  <a:txBody>
+                    <a:bodyPr wrap="square"/>
+                    <a:lstStyle/>
+                    <a:p>
+                      <a:r>
+                        <a:rPr sz="1100" b="1">
+                          <a:solidFill>
+                            <a:srgbClr val="52514E"/>
+                          </a:solidFill>
+                          <a:latin typeface="Calibri"/>
+                        </a:rPr>
+                        <a:t>Casa</a:t>
+                      </a:r>
+                    </a:p>
+                  </a:txBody>
+                  <a:tcPr>
+                    <a:solidFill>
+                      <a:srgbClr val="F1F0EC"/>
+                    </a:solidFill>
+                  </a:tcPr>
+                </a:tc>
+                <a:tc>
+                  <a:txBody>
+                    <a:bodyPr wrap="square"/>
+                    <a:lstStyle/>
+                    <a:p>
+                      <a:r>
+                        <a:rPr sz="1100" b="1">
+                          <a:solidFill>
+                            <a:srgbClr val="52514E"/>
+                          </a:solidFill>
+                          <a:latin typeface="Calibri"/>
+                        </a:rPr>
+                        <a:t>Registrados</a:t>
+                      </a:r>
+                    </a:p>
+                  </a:txBody>
+                  <a:tcPr>
+                    <a:solidFill>
+                      <a:srgbClr val="F1F0EC"/>
+                    </a:solidFill>
+                  </a:tcPr>
+                </a:tc>
+                <a:tc>
+                  <a:txBody>
+                    <a:bodyPr wrap="square"/>
+                    <a:lstStyle/>
+                    <a:p>
+                      <a:r>
+                        <a:rPr sz="1100" b="1">
+                          <a:solidFill>
+                            <a:srgbClr val="52514E"/>
+                          </a:solidFill>
+                          <a:latin typeface="Calibri"/>
+                        </a:rPr>
+                        <a:t>Pre-operacionais</a:t>
+                      </a:r>
+                    </a:p>
+                  </a:txBody>
+                  <a:tcPr>
+                    <a:solidFill>
+                      <a:srgbClr val="F1F0EC"/>
+                    </a:solidFill>
+                  </a:tcPr>
+                </a:tc>
+              </a:tr>
+              <a:tr h="292608">
+                <a:tc>
+                  <a:txBody>
+                    <a:bodyPr wrap="square"/>
+                    <a:lstStyle/>
+                    <a:p>
+                      <a:r>
+                        <a:rPr sz="1100" b="0">
+                          <a:solidFill>
+                            <a:srgbClr val="0B0B0B"/>
+                          </a:solidFill>
+                          <a:latin typeface="Calibri"/>
+                        </a:rPr>
+                        <a:t>BTG Pactual</a:t>
+                      </a:r>
+                    </a:p>
+                  </a:txBody>
+                  <a:tcPr>
+                    <a:solidFill>
+                      <a:srgbClr val="FFFFFF"/>
+                    </a:solidFill>
+                  </a:tcPr>
+                </a:tc>
+                <a:tc>
+                  <a:txBody>
+                    <a:bodyPr wrap="square"/>
+                    <a:lstStyle/>
+                    <a:p>
+                      <a:r>
+                        <a:rPr sz="1100" b="0">
+                          <a:solidFill>
+                            <a:srgbClr val="0B0B0B"/>
+                          </a:solidFill>
+                          <a:latin typeface="Calibri"/>
+                        </a:rPr>
+                        <a:t>4.404</a:t>
+                      </a:r>
+                    </a:p>
+                  </a:txBody>
+                  <a:tcPr>
+                    <a:solidFill>
+                      <a:srgbClr val="FFFFFF"/>
+                    </a:solidFill>
+                  </a:tcPr>
+                </a:tc>
+                <a:tc>
+                  <a:txBody>
+                    <a:bodyPr wrap="square"/>
+                    <a:lstStyle/>
+                    <a:p>
+                      <a:r>
+                        <a:rPr sz="1100" b="0">
+                          <a:solidFill>
+                            <a:srgbClr val="0B0B0B"/>
+                          </a:solidFill>
+                          <a:latin typeface="Calibri"/>
+                        </a:rPr>
+                        <a:t>84</a:t>
+                      </a:r>
+                    </a:p>
+                  </a:txBody>
+                  <a:tcPr>
+                    <a:solidFill>
+                      <a:srgbClr val="FFFFFF"/>
+                    </a:solidFill>
+                  </a:tcPr>
+                </a:tc>
+              </a:tr>
+              <a:tr h="292608">
+                <a:tc>
+                  <a:txBody>
+                    <a:bodyPr wrap="square"/>
+                    <a:lstStyle/>
+                    <a:p>
+                      <a:r>
+                        <a:rPr sz="1100" b="0">
+                          <a:solidFill>
+                            <a:srgbClr val="0B0B0B"/>
+                          </a:solidFill>
+                          <a:latin typeface="Calibri"/>
+                        </a:rPr>
+                        <a:t>Banco Inter</a:t>
+                      </a:r>
+                    </a:p>
+                  </a:txBody>
+                  <a:tcPr>
+                    <a:solidFill>
+                      <a:srgbClr val="FFFFFF"/>
+                    </a:solidFill>
+                  </a:tcPr>
+                </a:tc>
+                <a:tc>
+                  <a:txBody>
+                    <a:bodyPr wrap="square"/>
+                    <a:lstStyle/>
+                    <a:p>
+                      <a:r>
+                        <a:rPr sz="1100" b="0">
+                          <a:solidFill>
+                            <a:srgbClr val="0B0B0B"/>
+                          </a:solidFill>
+                          <a:latin typeface="Calibri"/>
+                        </a:rPr>
+                        <a:t>159</a:t>
+                      </a:r>
+                    </a:p>
+                  </a:txBody>
+                  <a:tcPr>
+                    <a:solidFill>
+                      <a:srgbClr val="FFFFFF"/>
+                    </a:solidFill>
+                  </a:tcPr>
+                </a:tc>
+                <a:tc>
+                  <a:txBody>
+                    <a:bodyPr wrap="square"/>
+                    <a:lstStyle/>
+                    <a:p>
+                      <a:r>
+                        <a:rPr sz="1100" b="0">
+                          <a:solidFill>
+                            <a:srgbClr val="0B0B0B"/>
+                          </a:solidFill>
+                          <a:latin typeface="Calibri"/>
+                        </a:rPr>
+                        <a:t>2</a:t>
+                      </a:r>
+                    </a:p>
+                  </a:txBody>
+                  <a:tcPr>
+                    <a:solidFill>
+                      <a:srgbClr val="FFFFFF"/>
+                    </a:solidFill>
+                  </a:tcPr>
+                </a:tc>
+              </a:tr>
+              <a:tr h="292608">
+                <a:tc>
+                  <a:txBody>
+                    <a:bodyPr wrap="square"/>
+                    <a:lstStyle/>
+                    <a:p>
+                      <a:r>
+                        <a:rPr sz="1100" b="0">
+                          <a:solidFill>
+                            <a:srgbClr val="0B0B0B"/>
+                          </a:solidFill>
+                          <a:latin typeface="Calibri"/>
+                        </a:rPr>
+                        <a:t>Itau (Ion)</a:t>
+                      </a:r>
+                    </a:p>
+                  </a:txBody>
+                  <a:tcPr>
+                    <a:solidFill>
+                      <a:srgbClr val="FFFFFF"/>
+                    </a:solidFill>
+                  </a:tcPr>
+                </a:tc>
+                <a:tc>
+                  <a:txBody>
+                    <a:bodyPr wrap="square"/>
+                    <a:lstStyle/>
+                    <a:p>
+                      <a:r>
+                        <a:rPr sz="1100" b="0">
+                          <a:solidFill>
+                            <a:srgbClr val="0B0B0B"/>
+                          </a:solidFill>
+                          <a:latin typeface="Calibri"/>
+                        </a:rPr>
+                        <a:t>5.045</a:t>
+                      </a:r>
+                    </a:p>
+                  </a:txBody>
+                  <a:tcPr>
+                    <a:solidFill>
+                      <a:srgbClr val="FFFFFF"/>
+                    </a:solidFill>
+                  </a:tcPr>
+                </a:tc>
+                <a:tc>
+                  <a:txBody>
+                    <a:bodyPr wrap="square"/>
+                    <a:lstStyle/>
+                    <a:p>
+                      <a:r>
+                        <a:rPr sz="1100" b="0">
+                          <a:solidFill>
+                            <a:srgbClr val="0B0B0B"/>
+                          </a:solidFill>
+                          <a:latin typeface="Calibri"/>
+                        </a:rPr>
+                        <a:t>219</a:t>
+                      </a:r>
+                    </a:p>
+                  </a:txBody>
+                  <a:tcPr>
+                    <a:solidFill>
+                      <a:srgbClr val="FFFFFF"/>
+                    </a:solidFill>
+                  </a:tcPr>
+                </a:tc>
+              </a:tr>
+              <a:tr h="292608">
+                <a:tc>
+                  <a:txBody>
+                    <a:bodyPr wrap="square"/>
+                    <a:lstStyle/>
+                    <a:p>
+                      <a:r>
+                        <a:rPr sz="1100" b="0">
+                          <a:solidFill>
+                            <a:srgbClr val="0B0B0B"/>
+                          </a:solidFill>
+                          <a:latin typeface="Calibri"/>
+                        </a:rPr>
+                        <a:t>Nu (Nubank)</a:t>
+                      </a:r>
+                    </a:p>
+                  </a:txBody>
+                  <a:tcPr>
+                    <a:solidFill>
+                      <a:srgbClr val="FFFFFF"/>
+                    </a:solidFill>
+                  </a:tcPr>
+                </a:tc>
+                <a:tc>
+                  <a:txBody>
+                    <a:bodyPr wrap="square"/>
+                    <a:lstStyle/>
+                    <a:p>
+                      <a:r>
+                        <a:rPr sz="1100" b="0">
+                          <a:solidFill>
+                            <a:srgbClr val="0B0B0B"/>
+                          </a:solidFill>
+                          <a:latin typeface="Calibri"/>
+                        </a:rPr>
+                        <a:t>50</a:t>
+                      </a:r>
+                    </a:p>
+                  </a:txBody>
+                  <a:tcPr>
+                    <a:solidFill>
+                      <a:srgbClr val="FFFFFF"/>
+                    </a:solidFill>
+                  </a:tcPr>
+                </a:tc>
+                <a:tc>
+                  <a:txBody>
+                    <a:bodyPr wrap="square"/>
+                    <a:lstStyle/>
+                    <a:p>
+                      <a:r>
+                        <a:rPr sz="1100" b="0">
+                          <a:solidFill>
+                            <a:srgbClr val="0B0B0B"/>
+                          </a:solidFill>
+                          <a:latin typeface="Calibri"/>
+                        </a:rPr>
+                        <a:t>4</a:t>
+                      </a:r>
+                    </a:p>
+                  </a:txBody>
+                  <a:tcPr>
+                    <a:solidFill>
+                      <a:srgbClr val="FFFFFF"/>
+                    </a:solidFill>
+                  </a:tcPr>
+                </a:tc>
+              </a:tr>
+              <a:tr h="292608">
+                <a:tc>
+                  <a:txBody>
+                    <a:bodyPr wrap="square"/>
+                    <a:lstStyle/>
+                    <a:p>
+                      <a:r>
+                        <a:rPr sz="1100" b="0">
+                          <a:solidFill>
+                            <a:srgbClr val="0B0B0B"/>
+                          </a:solidFill>
+                          <a:latin typeface="Calibri"/>
+                        </a:rPr>
+                        <a:t>XP Investimentos</a:t>
+                      </a:r>
+                    </a:p>
+                  </a:txBody>
+                  <a:tcPr>
+                    <a:solidFill>
+                      <a:srgbClr val="FFFFFF"/>
+                    </a:solidFill>
+                  </a:tcPr>
+                </a:tc>
+                <a:tc>
+                  <a:txBody>
+                    <a:bodyPr wrap="square"/>
+                    <a:lstStyle/>
+                    <a:p>
+                      <a:r>
+                        <a:rPr sz="1100" b="0">
+                          <a:solidFill>
+                            <a:srgbClr val="0B0B0B"/>
+                          </a:solidFill>
+                          <a:latin typeface="Calibri"/>
+                        </a:rPr>
+                        <a:t>2.178</a:t>
+                      </a:r>
+                    </a:p>
+                  </a:txBody>
+                  <a:tcPr>
+                    <a:solidFill>
+                      <a:srgbClr val="FFFFFF"/>
+                    </a:solidFill>
+                  </a:tcPr>
+                </a:tc>
+                <a:tc>
+                  <a:txBody>
+                    <a:bodyPr wrap="square"/>
+                    <a:lstStyle/>
+                    <a:p>
+                      <a:r>
+                        <a:rPr sz="1100" b="0">
+                          <a:solidFill>
+                            <a:srgbClr val="0B0B0B"/>
+                          </a:solidFill>
+                          <a:latin typeface="Calibri"/>
+                        </a:rPr>
+                        <a:t>69</a:t>
+                      </a:r>
+                    </a:p>
+                  </a:txBody>
+                  <a:tcPr>
+                    <a:solidFill>
+                      <a:srgbClr val="FFFFFF"/>
+                    </a:solidFill>
+                  </a:tcPr>
+                </a:tc>
+              </a:tr>
+            </a:tbl>
+          </a:graphicData>
+        </a:graphic>
+      </p:graphicFrame>
+      <p:sp>
+        <p:nvSpPr>
+          <p:cNvPr id="6" name="TextBox 5"/>
+          <p:cNvSpPr txBox="1"/>
+          <p:nvPr/>
+        </p:nvSpPr>
+        <p:spPr>
+          <a:xfrm>
+            <a:off x="548640" y="3584448"/>
+            <a:ext cx="10972800" cy="365760"/>
+          </a:xfrm>
+          <a:prstGeom prst="rect">
+            <a:avLst/>
+          </a:prstGeom>
+          <a:noFill/>
+        </p:spPr>
+        <p:txBody>
+          <a:bodyPr wrap="square">
+            <a:spAutoFit/>
+          </a:bodyPr>
+          <a:lstStyle/>
+          <a:p>
+            <a:r>
+              <a:rPr sz="1300" b="1">
+                <a:solidFill>
+                  <a:srgbClr val="0B0B0B"/>
+                </a:solidFill>
+                <a:latin typeface="Calibri"/>
+              </a:rPr>
+              <a:t>Registros pre-operacionais mais recentes</a:t>
+            </a:r>
+          </a:p>
+        </p:txBody>
+      </p:sp>
+      <p:graphicFrame>
+        <p:nvGraphicFramePr>
+          <p:cNvPr id="7" name="Table 6"/>
+          <p:cNvGraphicFramePr>
+            <a:graphicFrameLocks noGrp="1"/>
+          </p:cNvGraphicFramePr>
+          <p:nvPr/>
+        </p:nvGraphicFramePr>
+        <p:xfrm>
+          <a:off x="548640" y="3995928"/>
+          <a:ext cx="11064239" cy="2048256"/>
+        </p:xfrm>
+        <a:graphic>
+          <a:graphicData uri="http://schemas.openxmlformats.org/drawingml/2006/table">
+            <a:tbl>
+              <a:tblPr>
+                <a:tableStyleId>{5C22544A-7EE6-4342-B048-85BDC9FD1C3A}</a:tableStyleId>
+              </a:tblPr>
+              <a:tblGrid>
+                <a:gridCol w="5423647"/>
+                <a:gridCol w="1518621"/>
+                <a:gridCol w="2820296"/>
+                <a:gridCol w="1301675"/>
+              </a:tblGrid>
+              <a:tr h="292608">
+                <a:tc>
+                  <a:txBody>
+                    <a:bodyPr wrap="square"/>
+                    <a:lstStyle/>
+                    <a:p>
+                      <a:r>
+                        <a:rPr sz="900" b="1">
+                          <a:solidFill>
+                            <a:srgbClr val="52514E"/>
+                          </a:solidFill>
+                          <a:latin typeface="Calibri"/>
+                        </a:rPr>
+                        <a:t>Fundo</a:t>
+                      </a:r>
+                    </a:p>
+                  </a:txBody>
+                  <a:tcPr>
+                    <a:solidFill>
+                      <a:srgbClr val="F1F0EC"/>
+                    </a:solidFill>
+                  </a:tcPr>
+                </a:tc>
+                <a:tc>
+                  <a:txBody>
+                    <a:bodyPr wrap="square"/>
+                    <a:lstStyle/>
+                    <a:p>
+                      <a:r>
+                        <a:rPr sz="900" b="1">
+                          <a:solidFill>
+                            <a:srgbClr val="52514E"/>
+                          </a:solidFill>
+                          <a:latin typeface="Calibri"/>
+                        </a:rPr>
+                        <a:t>Casa</a:t>
+                      </a:r>
+                    </a:p>
+                  </a:txBody>
+                  <a:tcPr>
+                    <a:solidFill>
+                      <a:srgbClr val="F1F0EC"/>
+                    </a:solidFill>
+                  </a:tcPr>
+                </a:tc>
+                <a:tc>
+                  <a:txBody>
+                    <a:bodyPr wrap="square"/>
+                    <a:lstStyle/>
+                    <a:p>
+                      <a:r>
+                        <a:rPr sz="900" b="1">
+                          <a:solidFill>
+                            <a:srgbClr val="52514E"/>
+                          </a:solidFill>
+                          <a:latin typeface="Calibri"/>
+                        </a:rPr>
+                        <a:t>Gestora</a:t>
+                      </a:r>
+                    </a:p>
+                  </a:txBody>
+                  <a:tcPr>
+                    <a:solidFill>
+                      <a:srgbClr val="F1F0EC"/>
+                    </a:solidFill>
+                  </a:tcPr>
+                </a:tc>
+                <a:tc>
+                  <a:txBody>
+                    <a:bodyPr wrap="square"/>
+                    <a:lstStyle/>
+                    <a:p>
+                      <a:r>
+                        <a:rPr sz="900" b="1">
+                          <a:solidFill>
+                            <a:srgbClr val="52514E"/>
+                          </a:solidFill>
+                          <a:latin typeface="Calibri"/>
+                        </a:rPr>
+                        <a:t>Registro</a:t>
+                      </a:r>
+                    </a:p>
+                  </a:txBody>
+                  <a:tcPr>
+                    <a:solidFill>
+                      <a:srgbClr val="F1F0EC"/>
+                    </a:solidFill>
+                  </a:tcPr>
+                </a:tc>
+              </a:tr>
+              <a:tr h="292608">
+                <a:tc>
+                  <a:txBody>
+                    <a:bodyPr wrap="square"/>
+                    <a:lstStyle/>
+                    <a:p>
+                      <a:r>
+                        <a:rPr sz="900" b="0">
+                          <a:solidFill>
+                            <a:srgbClr val="0B0B0B"/>
+                          </a:solidFill>
+                          <a:latin typeface="Calibri"/>
+                        </a:rPr>
+                        <a:t>XP CDI 94 CRA I FIAGRO RESPONSABILIDADE LIMITADA</a:t>
+                      </a:r>
+                    </a:p>
+                  </a:txBody>
+                  <a:tcPr>
+                    <a:solidFill>
+                      <a:srgbClr val="FFFFFF"/>
+                    </a:solidFill>
+                  </a:tcPr>
+                </a:tc>
+                <a:tc>
+                  <a:txBody>
+                    <a:bodyPr wrap="square"/>
+                    <a:lstStyle/>
+                    <a:p>
+                      <a:r>
+                        <a:rPr sz="900" b="0">
+                          <a:solidFill>
+                            <a:srgbClr val="0B0B0B"/>
+                          </a:solidFill>
+                          <a:latin typeface="Calibri"/>
+                        </a:rPr>
+                        <a:t>XP Investimentos</a:t>
+                      </a:r>
+                    </a:p>
+                  </a:txBody>
+                  <a:tcPr>
+                    <a:solidFill>
+                      <a:srgbClr val="FFFFFF"/>
+                    </a:solidFill>
+                  </a:tcPr>
+                </a:tc>
+                <a:tc>
+                  <a:txBody>
+                    <a:bodyPr wrap="square"/>
+                    <a:lstStyle/>
+                    <a:p>
+                      <a:r>
+                        <a:rPr sz="900" b="0">
+                          <a:solidFill>
+                            <a:srgbClr val="0B0B0B"/>
+                          </a:solidFill>
+                          <a:latin typeface="Calibri"/>
+                        </a:rPr>
+                        <a:t>XP VISTA ASSET MANAGEMENT LTDA.</a:t>
+                      </a:r>
+                    </a:p>
+                  </a:txBody>
+                  <a:tcPr>
+                    <a:solidFill>
+                      <a:srgbClr val="FFFFFF"/>
+                    </a:solidFill>
+                  </a:tcPr>
+                </a:tc>
+                <a:tc>
+                  <a:txBody>
+                    <a:bodyPr wrap="square"/>
+                    <a:lstStyle/>
+                    <a:p>
+                      <a:r>
+                        <a:rPr sz="900" b="0">
+                          <a:solidFill>
+                            <a:srgbClr val="0B0B0B"/>
+                          </a:solidFill>
+                          <a:latin typeface="Calibri"/>
+                        </a:rPr>
+                        <a:t>2026-09-18</a:t>
+                      </a:r>
+                    </a:p>
+                  </a:txBody>
+                  <a:tcPr>
+                    <a:solidFill>
+                      <a:srgbClr val="FFFFFF"/>
+                    </a:solidFill>
+                  </a:tcPr>
+                </a:tc>
+              </a:tr>
+              <a:tr h="292608">
+                <a:tc>
+                  <a:txBody>
+                    <a:bodyPr wrap="square"/>
+                    <a:lstStyle/>
+                    <a:p>
+                      <a:r>
+                        <a:rPr sz="900" b="0">
+                          <a:solidFill>
+                            <a:srgbClr val="0B0B0B"/>
+                          </a:solidFill>
+                          <a:latin typeface="Calibri"/>
+                        </a:rPr>
+                        <a:t>XP CDI 95 CRA I FIAGRO RESPONSABILIDADE LIMITADA</a:t>
+                      </a:r>
+                    </a:p>
+                  </a:txBody>
+                  <a:tcPr>
+                    <a:solidFill>
+                      <a:srgbClr val="FFFFFF"/>
+                    </a:solidFill>
+                  </a:tcPr>
+                </a:tc>
+                <a:tc>
+                  <a:txBody>
+                    <a:bodyPr wrap="square"/>
+                    <a:lstStyle/>
+                    <a:p>
+                      <a:r>
+                        <a:rPr sz="900" b="0">
+                          <a:solidFill>
+                            <a:srgbClr val="0B0B0B"/>
+                          </a:solidFill>
+                          <a:latin typeface="Calibri"/>
+                        </a:rPr>
+                        <a:t>XP Investimentos</a:t>
+                      </a:r>
+                    </a:p>
+                  </a:txBody>
+                  <a:tcPr>
+                    <a:solidFill>
+                      <a:srgbClr val="FFFFFF"/>
+                    </a:solidFill>
+                  </a:tcPr>
+                </a:tc>
+                <a:tc>
+                  <a:txBody>
+                    <a:bodyPr wrap="square"/>
+                    <a:lstStyle/>
+                    <a:p>
+                      <a:r>
+                        <a:rPr sz="900" b="0">
+                          <a:solidFill>
+                            <a:srgbClr val="0B0B0B"/>
+                          </a:solidFill>
+                          <a:latin typeface="Calibri"/>
+                        </a:rPr>
+                        <a:t>XP VISTA ASSET MANAGEMENT LTDA.</a:t>
+                      </a:r>
+                    </a:p>
+                  </a:txBody>
+                  <a:tcPr>
+                    <a:solidFill>
+                      <a:srgbClr val="FFFFFF"/>
+                    </a:solidFill>
+                  </a:tcPr>
+                </a:tc>
+                <a:tc>
+                  <a:txBody>
+                    <a:bodyPr wrap="square"/>
+                    <a:lstStyle/>
+                    <a:p>
+                      <a:r>
+                        <a:rPr sz="900" b="0">
+                          <a:solidFill>
+                            <a:srgbClr val="0B0B0B"/>
+                          </a:solidFill>
+                          <a:latin typeface="Calibri"/>
+                        </a:rPr>
+                        <a:t>2026-09-18</a:t>
+                      </a:r>
+                    </a:p>
+                  </a:txBody>
+                  <a:tcPr>
+                    <a:solidFill>
+                      <a:srgbClr val="FFFFFF"/>
+                    </a:solidFill>
+                  </a:tcPr>
+                </a:tc>
+              </a:tr>
+              <a:tr h="292608">
+                <a:tc>
+                  <a:txBody>
+                    <a:bodyPr wrap="square"/>
+                    <a:lstStyle/>
+                    <a:p>
+                      <a:r>
+                        <a:rPr sz="900" b="0">
+                          <a:solidFill>
+                            <a:srgbClr val="0B0B0B"/>
+                          </a:solidFill>
+                          <a:latin typeface="Calibri"/>
+                        </a:rPr>
+                        <a:t>XP CDI CRA FIAGRO RESPONSABILIDADE LIMITADA</a:t>
+                      </a:r>
+                    </a:p>
+                  </a:txBody>
+                  <a:tcPr>
+                    <a:solidFill>
+                      <a:srgbClr val="FFFFFF"/>
+                    </a:solidFill>
+                  </a:tcPr>
+                </a:tc>
+                <a:tc>
+                  <a:txBody>
+                    <a:bodyPr wrap="square"/>
+                    <a:lstStyle/>
+                    <a:p>
+                      <a:r>
+                        <a:rPr sz="900" b="0">
+                          <a:solidFill>
+                            <a:srgbClr val="0B0B0B"/>
+                          </a:solidFill>
+                          <a:latin typeface="Calibri"/>
+                        </a:rPr>
+                        <a:t>XP Investimentos</a:t>
+                      </a:r>
+                    </a:p>
+                  </a:txBody>
+                  <a:tcPr>
+                    <a:solidFill>
+                      <a:srgbClr val="FFFFFF"/>
+                    </a:solidFill>
+                  </a:tcPr>
+                </a:tc>
+                <a:tc>
+                  <a:txBody>
+                    <a:bodyPr wrap="square"/>
+                    <a:lstStyle/>
+                    <a:p>
+                      <a:r>
+                        <a:rPr sz="900" b="0">
+                          <a:solidFill>
+                            <a:srgbClr val="0B0B0B"/>
+                          </a:solidFill>
+                          <a:latin typeface="Calibri"/>
+                        </a:rPr>
+                        <a:t>XP VISTA ASSET MANAGEMENT LTDA.</a:t>
+                      </a:r>
+                    </a:p>
+                  </a:txBody>
+                  <a:tcPr>
+                    <a:solidFill>
+                      <a:srgbClr val="FFFFFF"/>
+                    </a:solidFill>
+                  </a:tcPr>
+                </a:tc>
+                <a:tc>
+                  <a:txBody>
+                    <a:bodyPr wrap="square"/>
+                    <a:lstStyle/>
+                    <a:p>
+                      <a:r>
+                        <a:rPr sz="900" b="0">
+                          <a:solidFill>
+                            <a:srgbClr val="0B0B0B"/>
+                          </a:solidFill>
+                          <a:latin typeface="Calibri"/>
+                        </a:rPr>
+                        <a:t>2026-09-18</a:t>
+                      </a:r>
+                    </a:p>
+                  </a:txBody>
+                  <a:tcPr>
+                    <a:solidFill>
+                      <a:srgbClr val="FFFFFF"/>
+                    </a:solidFill>
+                  </a:tcPr>
+                </a:tc>
+              </a:tr>
+              <a:tr h="292608">
+                <a:tc>
+                  <a:txBody>
+                    <a:bodyPr wrap="square"/>
+                    <a:lstStyle/>
+                    <a:p>
+                      <a:r>
+                        <a:rPr sz="900" b="0">
+                          <a:solidFill>
+                            <a:srgbClr val="0B0B0B"/>
+                          </a:solidFill>
+                          <a:latin typeface="Calibri"/>
+                        </a:rPr>
+                        <a:t>INDIANA II FUNDO DE INVESTIMENTO FINANCEIRO MULTIMERCADO CRÉDITO PRIVA</a:t>
+                      </a:r>
+                    </a:p>
+                  </a:txBody>
+                  <a:tcPr>
+                    <a:solidFill>
+                      <a:srgbClr val="FFFFFF"/>
+                    </a:solidFill>
+                  </a:tcPr>
+                </a:tc>
+                <a:tc>
+                  <a:txBody>
+                    <a:bodyPr wrap="square"/>
+                    <a:lstStyle/>
+                    <a:p>
+                      <a:r>
+                        <a:rPr sz="900" b="0">
+                          <a:solidFill>
+                            <a:srgbClr val="0B0B0B"/>
+                          </a:solidFill>
+                          <a:latin typeface="Calibri"/>
+                        </a:rPr>
+                        <a:t>Itau (Ion)</a:t>
+                      </a:r>
+                    </a:p>
+                  </a:txBody>
+                  <a:tcPr>
+                    <a:solidFill>
+                      <a:srgbClr val="FFFFFF"/>
+                    </a:solidFill>
+                  </a:tcPr>
+                </a:tc>
+                <a:tc>
+                  <a:txBody>
+                    <a:bodyPr wrap="square"/>
+                    <a:lstStyle/>
+                    <a:p>
+                      <a:r>
+                        <a:rPr sz="900" b="0">
+                          <a:solidFill>
+                            <a:srgbClr val="0B0B0B"/>
+                          </a:solidFill>
+                          <a:latin typeface="Calibri"/>
+                        </a:rPr>
+                        <a:t>ITAU UNIBANCO ASSET MANAGEMENT LTDA.</a:t>
+                      </a:r>
+                    </a:p>
+                  </a:txBody>
+                  <a:tcPr>
+                    <a:solidFill>
+                      <a:srgbClr val="FFFFFF"/>
+                    </a:solidFill>
+                  </a:tcPr>
+                </a:tc>
+                <a:tc>
+                  <a:txBody>
+                    <a:bodyPr wrap="square"/>
+                    <a:lstStyle/>
+                    <a:p>
+                      <a:r>
+                        <a:rPr sz="900" b="0">
+                          <a:solidFill>
+                            <a:srgbClr val="0B0B0B"/>
+                          </a:solidFill>
+                          <a:latin typeface="Calibri"/>
+                        </a:rPr>
+                        <a:t>2026-09-18</a:t>
+                      </a:r>
+                    </a:p>
+                  </a:txBody>
+                  <a:tcPr>
+                    <a:solidFill>
+                      <a:srgbClr val="FFFFFF"/>
+                    </a:solidFill>
+                  </a:tcPr>
+                </a:tc>
+              </a:tr>
+              <a:tr h="292608">
+                <a:tc>
+                  <a:txBody>
+                    <a:bodyPr wrap="square"/>
+                    <a:lstStyle/>
+                    <a:p>
+                      <a:r>
+                        <a:rPr sz="900" b="0">
+                          <a:solidFill>
+                            <a:srgbClr val="0B0B0B"/>
+                          </a:solidFill>
+                          <a:latin typeface="Calibri"/>
+                        </a:rPr>
+                        <a:t>BTG PACTUAL FEEDER I FUNDO DE INVESTIMENTO FINANCEIRO MULTIMERCADO CRÉ</a:t>
+                      </a:r>
+                    </a:p>
+                  </a:txBody>
+                  <a:tcPr>
+                    <a:solidFill>
+                      <a:srgbClr val="FFFFFF"/>
+                    </a:solidFill>
+                  </a:tcPr>
+                </a:tc>
+                <a:tc>
+                  <a:txBody>
+                    <a:bodyPr wrap="square"/>
+                    <a:lstStyle/>
+                    <a:p>
+                      <a:r>
+                        <a:rPr sz="900" b="0">
+                          <a:solidFill>
+                            <a:srgbClr val="0B0B0B"/>
+                          </a:solidFill>
+                          <a:latin typeface="Calibri"/>
+                        </a:rPr>
+                        <a:t>BTG Pactual</a:t>
+                      </a:r>
+                    </a:p>
+                  </a:txBody>
+                  <a:tcPr>
+                    <a:solidFill>
+                      <a:srgbClr val="FFFFFF"/>
+                    </a:solidFill>
+                  </a:tcPr>
+                </a:tc>
+                <a:tc>
+                  <a:txBody>
+                    <a:bodyPr wrap="square"/>
+                    <a:lstStyle/>
+                    <a:p>
+                      <a:r>
+                        <a:rPr sz="900" b="0">
+                          <a:solidFill>
+                            <a:srgbClr val="0B0B0B"/>
+                          </a:solidFill>
+                          <a:latin typeface="Calibri"/>
+                        </a:rPr>
+                        <a:t>BTG PACTUAL ASSET MANAGEMENT S/A DTVM</a:t>
+                      </a:r>
+                    </a:p>
+                  </a:txBody>
+                  <a:tcPr>
+                    <a:solidFill>
+                      <a:srgbClr val="FFFFFF"/>
+                    </a:solidFill>
+                  </a:tcPr>
+                </a:tc>
+                <a:tc>
+                  <a:txBody>
+                    <a:bodyPr wrap="square"/>
+                    <a:lstStyle/>
+                    <a:p>
+                      <a:r>
+                        <a:rPr sz="900" b="0">
+                          <a:solidFill>
+                            <a:srgbClr val="0B0B0B"/>
+                          </a:solidFill>
+                          <a:latin typeface="Calibri"/>
+                        </a:rPr>
+                        <a:t>2026-09-18</a:t>
+                      </a:r>
+                    </a:p>
+                  </a:txBody>
+                  <a:tcPr>
+                    <a:solidFill>
+                      <a:srgbClr val="FFFFFF"/>
+                    </a:solidFill>
+                  </a:tcPr>
+                </a:tc>
+              </a:tr>
+              <a:tr h="292608">
+                <a:tc>
+                  <a:txBody>
+                    <a:bodyPr wrap="square"/>
+                    <a:lstStyle/>
+                    <a:p>
+                      <a:r>
+                        <a:rPr sz="900" b="0">
+                          <a:solidFill>
+                            <a:srgbClr val="0B0B0B"/>
+                          </a:solidFill>
+                          <a:latin typeface="Calibri"/>
+                        </a:rPr>
+                        <a:t>XP STRATEGY FI FINANCEIRO MULTIMERCADO CRÉDITO PRIVADO PREVIDENCIÁRIO </a:t>
+                      </a:r>
+                    </a:p>
+                  </a:txBody>
+                  <a:tcPr>
+                    <a:solidFill>
+                      <a:srgbClr val="FFFFFF"/>
+                    </a:solidFill>
+                  </a:tcPr>
+                </a:tc>
+                <a:tc>
+                  <a:txBody>
+                    <a:bodyPr wrap="square"/>
+                    <a:lstStyle/>
+                    <a:p>
+                      <a:r>
+                        <a:rPr sz="900" b="0">
+                          <a:solidFill>
+                            <a:srgbClr val="0B0B0B"/>
+                          </a:solidFill>
+                          <a:latin typeface="Calibri"/>
+                        </a:rPr>
+                        <a:t>XP Investimentos</a:t>
+                      </a:r>
+                    </a:p>
+                  </a:txBody>
+                  <a:tcPr>
+                    <a:solidFill>
+                      <a:srgbClr val="FFFFFF"/>
+                    </a:solidFill>
+                  </a:tcPr>
+                </a:tc>
+                <a:tc>
+                  <a:txBody>
+                    <a:bodyPr wrap="square"/>
+                    <a:lstStyle/>
+                    <a:p>
+                      <a:r>
+                        <a:rPr sz="900" b="0">
+                          <a:solidFill>
+                            <a:srgbClr val="0B0B0B"/>
+                          </a:solidFill>
+                          <a:latin typeface="Calibri"/>
+                        </a:rPr>
+                        <a:t>XP GESTÃO DE RECURSOS LTDA</a:t>
+                      </a:r>
+                    </a:p>
+                  </a:txBody>
+                  <a:tcPr>
+                    <a:solidFill>
+                      <a:srgbClr val="FFFFFF"/>
+                    </a:solidFill>
+                  </a:tcPr>
+                </a:tc>
+                <a:tc>
+                  <a:txBody>
+                    <a:bodyPr wrap="square"/>
+                    <a:lstStyle/>
+                    <a:p>
+                      <a:r>
+                        <a:rPr sz="900" b="0">
+                          <a:solidFill>
+                            <a:srgbClr val="0B0B0B"/>
+                          </a:solidFill>
+                          <a:latin typeface="Calibri"/>
+                        </a:rPr>
+                        <a:t>2026-09-18</a:t>
+                      </a:r>
+                    </a:p>
+                  </a:txBody>
+                  <a:tcPr>
+                    <a:solidFill>
+                      <a:srgbClr val="FFFFFF"/>
+                    </a:solidFill>
+                  </a:tcPr>
+                </a:tc>
+              </a:tr>
+            </a:tbl>
+          </a:graphicData>
+        </a:graphic>
+      </p:graphicFrame>
+    </p:spTree>
+  </p:cSld>
+  <p:clrMapOvr>
+    <a:masterClrMapping/>
+  </p:clrMapOvr>
+</p:sld>
+</file>
+
+<file path=ppt/slides/slide9.xml><?xml version="1.0" encoding="utf-8"?>
+<p:sld xmlns:a="http://schemas.openxmlformats.org/drawingml/2006/main" xmlns:p="http://schemas.openxmlformats.org/presentationml/2006/main" xmlns:r="http://schemas.openxmlformats.org/officeDocument/2006/relationships">
+  <p:cSld>
+    <p:spTree>
+      <p:nvGrpSpPr>
+        <p:cNvPr id="1" name=""/>
+        <p:cNvGrpSpPr/>
+        <p:nvPr/>
+      </p:nvGrpSpPr>
+      <p:grpSpPr/>
+      <p:sp>
+        <p:nvSpPr>
+          <p:cNvPr id="2" name="Rectangle 1"/>
+          <p:cNvSpPr/>
+          <p:nvPr/>
+        </p:nvSpPr>
+        <p:spPr>
+          <a:xfrm>
+            <a:off x="0" y="0"/>
+            <a:ext cx="12191695" cy="6858000"/>
+          </a:xfrm>
+          <a:prstGeom prst="rect">
+            <a:avLst/>
+          </a:prstGeom>
+          <a:solidFill>
+            <a:srgbClr val="FCFCFB"/>
+          </a:solidFill>
+          <a:ln>
+            <a:noFill/>
+          </a:ln>
+          <a:effectLst/>
+        </p:spPr>
+        <p:style>
+          <a:lnRef idx="1">
+            <a:schemeClr val="accent1"/>
+          </a:lnRef>
+          <a:fillRef idx="3">
+            <a:schemeClr val="accent1"/>
+          </a:fillRef>
+          <a:effectRef idx="2">
+            <a:schemeClr val="accent1"/>
+          </a:effectRef>
+          <a:fontRef idx="minor">
+            <a:schemeClr val="lt1"/>
+          </a:fontRef>
+        </p:style>
+        <p:txBody>
+          <a:bodyPr rtlCol="0" anchor="ctr"/>
+          <a:lstStyle/>
+          <a:p>
+            <a:pPr algn="ctr"/>
+          </a:p>
+        </p:txBody>
+      </p:sp>
+      <p:sp>
+        <p:nvSpPr>
+          <p:cNvPr id="3" name="TextBox 2"/>
+          <p:cNvSpPr txBox="1"/>
+          <p:nvPr/>
+        </p:nvSpPr>
+        <p:spPr>
+          <a:xfrm>
+            <a:off x="548640" y="320040"/>
+            <a:ext cx="11064240" cy="548640"/>
+          </a:xfrm>
+          <a:prstGeom prst="rect">
+            <a:avLst/>
+          </a:prstGeom>
+          <a:noFill/>
+        </p:spPr>
+        <p:txBody>
+          <a:bodyPr wrap="square">
+            <a:spAutoFit/>
+          </a:bodyPr>
+          <a:lstStyle/>
+          <a:p>
+            <a:r>
+              <a:rPr sz="2400" b="1">
+                <a:solidFill>
+                  <a:srgbClr val="0B0B0B"/>
+                </a:solidFill>
+                <a:latin typeface="Calibri"/>
+              </a:rPr>
               <a:t>Metodologia e proveniencia</a:t>
             </a:r>
           </a:p>
@@ -11092,7 +12350,7 @@
                 </a:solidFill>
                 <a:latin typeface="Calibri"/>
               </a:rPr>
-              <a:t>fundos exclusivos/restritos (3.616 nesta coleta) ficam fora de toda analise; o inventario deles esta na aba 'Restritos (auxiliar)' da planilha e no dashboard.</a:t>
+              <a:t>fundos exclusivos/restritos (3.602 nesta coleta) ficam fora de toda analise; o inventario deles esta na aba 'Restritos (auxiliar)' da planilha e no dashboard.</a:t>
             </a:r>
           </a:p>
         </p:txBody>
@@ -11228,7 +12486,7 @@
                 </a:solidFill>
                 <a:latin typeface="Calibri"/>
               </a:rPr>
-              <a:t>join com o registro oficial CVM por CNPJ e por codigo: 9200 de 13486 fundos identificaveis (68%); a gestora vem do registro em 9.199 deles.</a:t>
+              <a:t>join com o registro oficial CVM por CNPJ e por codigo: 9167 de 13486 fundos identificaveis (68%); a gestora vem do registro em 9.166 deles.</a:t>
             </a:r>
           </a:p>
         </p:txBody>
@@ -11296,7 +12554,7 @@
                 </a:solidFill>
                 <a:latin typeface="Calibri"/>
               </a:rPr>
-              <a:t>20/09/2026 - status ok; vitrine 668 de 781</a:t>
+              <a:t>20/09/2026 - status ok; vitrine 664 de 781</a:t>
             </a:r>
           </a:p>
         </p:txBody>
@@ -11364,7 +12622,7 @@
                 </a:solidFill>
                 <a:latin typeface="Calibri"/>
               </a:rPr>
-              <a:t>20/09/2026 - status ok; vitrine 660 de 10073</a:t>
+              <a:t>20/09/2026 - status ok; vitrine 634 de 10073</a:t>
             </a:r>
           </a:p>
         </p:txBody>
@@ -11432,7 +12690,7 @@
                 </a:solidFill>
                 <a:latin typeface="Calibri"/>
               </a:rPr>
-              <a:t>20/09/2026 - status ok; vitrine 459 de 2179</a:t>
+              <a:t>20/09/2026 - status ok; vitrine 458 de 2179</a:t>
             </a:r>
           </a:p>
         </p:txBody>

--- a/data/reports/prateleiras-2026-09-20.pptx
+++ b/data/reports/prateleiras-2026-09-20.pptx
@@ -4037,7 +4037,7 @@
                 </a:solidFill>
                 <a:latin typeface="Calibri"/>
               </a:rPr>
-              <a:t>Diferenciais na vitrine (por CNPJ)</a:t>
+              <a:t>Fundos so nesta vitrine (por CNPJ)</a:t>
             </a:r>
           </a:p>
         </p:txBody>
@@ -9395,7 +9395,7 @@
                 </a:solidFill>
                 <a:latin typeface="Calibri"/>
               </a:rPr>
-              <a:t>Custo e ticket de entrada</a:t>
+              <a:t>Custo relativo a categoria e ticket de entrada</a:t>
             </a:r>
           </a:p>
         </p:txBody>
@@ -9429,7 +9429,7 @@
                 </a:solidFill>
                 <a:latin typeface="Calibri"/>
               </a:rPr>
-              <a:t>Quartis da taxa de administracao e mediana do minimo - quartis mostram a forma da prateleira; media esconderia</a:t>
+              <a:t>Indice 1,00x = exatamente a mediana da categoria de cada fundo; o que decide e a diferenca ENTRE as casas, nao a distancia de 1,00x</a:t>
             </a:r>
           </a:p>
         </p:txBody>
@@ -9444,7 +9444,7 @@
         </p:nvGraphicFramePr>
         <p:xfrm>
           <a:off x="548640" y="1554480"/>
-          <a:ext cx="9601199" cy="1463040"/>
+          <a:ext cx="9601196" cy="1170432"/>
         </p:xfrm>
         <a:graphic>
           <a:graphicData uri="http://schemas.openxmlformats.org/drawingml/2006/table">
@@ -9453,12 +9453,12 @@
                 <a:tableStyleId>{5C22544A-7EE6-4342-B048-85BDC9FD1C3A}</a:tableStyleId>
               </a:tblPr>
               <a:tblGrid>
-                <a:gridCol w="2514600"/>
-                <a:gridCol w="1143000"/>
-                <a:gridCol w="1371600"/>
-                <a:gridCol w="1143000"/>
-                <a:gridCol w="1828800"/>
-                <a:gridCol w="1600199"/>
+                <a:gridCol w="2295939"/>
+                <a:gridCol w="1669773"/>
+                <a:gridCol w="1043608"/>
+                <a:gridCol w="1147969"/>
+                <a:gridCol w="1774134"/>
+                <a:gridCol w="1669773"/>
               </a:tblGrid>
               <a:tr h="292608">
                 <a:tc>
@@ -9495,7 +9495,7 @@
                           </a:solidFill>
                           <a:latin typeface="Calibri"/>
                         </a:rPr>
-                        <a:t>Taxa q1</a:t>
+                        <a:t>Indice mediano</a:t>
                       </a:r>
                     </a:p>
                   </a:txBody>
@@ -9517,7 +9517,7 @@
                           </a:solidFill>
                           <a:latin typeface="Calibri"/>
                         </a:rPr>
-                        <a:t>Taxa mediana</a:t>
+                        <a:t>Caros</a:t>
                       </a:r>
                     </a:p>
                   </a:txBody>
@@ -9539,7 +9539,7 @@
                           </a:solidFill>
                           <a:latin typeface="Calibri"/>
                         </a:rPr>
-                        <a:t>Taxa q3</a:t>
+                        <a:t>Baratos</a:t>
                       </a:r>
                     </a:p>
                   </a:txBody>
@@ -9561,7 +9561,7 @@
                           </a:solidFill>
                           <a:latin typeface="Calibri"/>
                         </a:rPr>
-                        <a:t>Minimo mediano</a:t>
+                        <a:t>Resgate ate D+1</a:t>
                       </a:r>
                     </a:p>
                   </a:txBody>
@@ -9583,7 +9583,7 @@
                           </a:solidFill>
                           <a:latin typeface="Calibri"/>
                         </a:rPr>
-                        <a:t>Cobertura CNPJ</a:t>
+                        <a:t>Ticket mediano</a:t>
                       </a:r>
                     </a:p>
                   </a:txBody>
@@ -9629,7 +9629,7 @@
                           </a:solidFill>
                           <a:latin typeface="Calibri"/>
                         </a:rPr>
-                        <a:t>0,01%</a:t>
+                        <a:t>1.65x</a:t>
                       </a:r>
                     </a:p>
                   </a:txBody>
@@ -9651,7 +9651,7 @@
                           </a:solidFill>
                           <a:latin typeface="Calibri"/>
                         </a:rPr>
-                        <a:t>0,01%</a:t>
+                        <a:t>68%</a:t>
                       </a:r>
                     </a:p>
                   </a:txBody>
@@ -9673,7 +9673,7 @@
                           </a:solidFill>
                           <a:latin typeface="Calibri"/>
                         </a:rPr>
-                        <a:t>0,02%</a:t>
+                        <a:t>5%</a:t>
                       </a:r>
                     </a:p>
                   </a:txBody>
@@ -9695,29 +9695,29 @@
                           </a:solidFill>
                           <a:latin typeface="Calibri"/>
                         </a:rPr>
+                        <a:t>31%</a:t>
+                      </a:r>
+                    </a:p>
+                  </a:txBody>
+                  <a:tcPr>
+                    <a:solidFill>
+                      <a:srgbClr val="FFFFFF"/>
+                    </a:solidFill>
+                  </a:tcPr>
+                </a:tc>
+                <a:tc>
+                  <a:txBody>
+                    <a:bodyPr wrap="square"/>
+                    <a:lstStyle/>
+                    <a:p>
+                      <a:r>
+                        <a:rPr sz="1100" b="0">
+                          <a:solidFill>
+                            <a:srgbClr val="0B0B0B"/>
+                          </a:solidFill>
+                          <a:latin typeface="Calibri"/>
+                        </a:rPr>
                         <a:t>R$ 50.000</a:t>
-                      </a:r>
-                    </a:p>
-                  </a:txBody>
-                  <a:tcPr>
-                    <a:solidFill>
-                      <a:srgbClr val="FFFFFF"/>
-                    </a:solidFill>
-                  </a:tcPr>
-                </a:tc>
-                <a:tc>
-                  <a:txBody>
-                    <a:bodyPr wrap="square"/>
-                    <a:lstStyle/>
-                    <a:p>
-                      <a:r>
-                        <a:rPr sz="1100" b="0">
-                          <a:solidFill>
-                            <a:srgbClr val="0B0B0B"/>
-                          </a:solidFill>
-                          <a:latin typeface="Calibri"/>
-                        </a:rPr>
-                        <a:t>93%</a:t>
                       </a:r>
                     </a:p>
                   </a:txBody>
@@ -9763,7 +9763,7 @@
                           </a:solidFill>
                           <a:latin typeface="Calibri"/>
                         </a:rPr>
-                        <a:t>0,01%</a:t>
+                        <a:t>1.50x</a:t>
                       </a:r>
                     </a:p>
                   </a:txBody>
@@ -9785,7 +9785,7 @@
                           </a:solidFill>
                           <a:latin typeface="Calibri"/>
                         </a:rPr>
-                        <a:t>0,02%</a:t>
+                        <a:t>61%</a:t>
                       </a:r>
                     </a:p>
                   </a:txBody>
@@ -9807,7 +9807,7 @@
                           </a:solidFill>
                           <a:latin typeface="Calibri"/>
                         </a:rPr>
-                        <a:t>0,08%</a:t>
+                        <a:t>12%</a:t>
                       </a:r>
                     </a:p>
                   </a:txBody>
@@ -9829,29 +9829,29 @@
                           </a:solidFill>
                           <a:latin typeface="Calibri"/>
                         </a:rPr>
+                        <a:t>31%</a:t>
+                      </a:r>
+                    </a:p>
+                  </a:txBody>
+                  <a:tcPr>
+                    <a:solidFill>
+                      <a:srgbClr val="FFFFFF"/>
+                    </a:solidFill>
+                  </a:tcPr>
+                </a:tc>
+                <a:tc>
+                  <a:txBody>
+                    <a:bodyPr wrap="square"/>
+                    <a:lstStyle/>
+                    <a:p>
+                      <a:r>
+                        <a:rPr sz="1100" b="0">
+                          <a:solidFill>
+                            <a:srgbClr val="0B0B0B"/>
+                          </a:solidFill>
+                          <a:latin typeface="Calibri"/>
+                        </a:rPr>
                         <a:t>R$ 50.000</a:t>
-                      </a:r>
-                    </a:p>
-                  </a:txBody>
-                  <a:tcPr>
-                    <a:solidFill>
-                      <a:srgbClr val="FFFFFF"/>
-                    </a:solidFill>
-                  </a:tcPr>
-                </a:tc>
-                <a:tc>
-                  <a:txBody>
-                    <a:bodyPr wrap="square"/>
-                    <a:lstStyle/>
-                    <a:p>
-                      <a:r>
-                        <a:rPr sz="1100" b="0">
-                          <a:solidFill>
-                            <a:srgbClr val="0B0B0B"/>
-                          </a:solidFill>
-                          <a:latin typeface="Calibri"/>
-                        </a:rPr>
-                        <a:t>100%</a:t>
                       </a:r>
                     </a:p>
                   </a:txBody>
@@ -9875,7 +9875,7 @@
                           </a:solidFill>
                           <a:latin typeface="Calibri"/>
                         </a:rPr>
-                        <a:t>Itau (Ion)</a:t>
+                        <a:t>Banco Inter</a:t>
                       </a:r>
                     </a:p>
                   </a:txBody>
@@ -9897,7 +9897,7 @@
                           </a:solidFill>
                           <a:latin typeface="Calibri"/>
                         </a:rPr>
-                        <a:t>0,80%</a:t>
+                        <a:t>1.57x</a:t>
                       </a:r>
                     </a:p>
                   </a:txBody>
@@ -9919,7 +9919,7 @@
                           </a:solidFill>
                           <a:latin typeface="Calibri"/>
                         </a:rPr>
-                        <a:t>1,40%</a:t>
+                        <a:t>75%</a:t>
                       </a:r>
                     </a:p>
                   </a:txBody>
@@ -9941,7 +9941,7 @@
                           </a:solidFill>
                           <a:latin typeface="Calibri"/>
                         </a:rPr>
-                        <a:t>2%</a:t>
+                        <a:t>6%</a:t>
                       </a:r>
                     </a:p>
                   </a:txBody>
@@ -9963,7 +9963,7 @@
                           </a:solidFill>
                           <a:latin typeface="Calibri"/>
                         </a:rPr>
-                        <a:t>R$ 500</a:t>
+                        <a:t>26%</a:t>
                       </a:r>
                     </a:p>
                   </a:txBody>
@@ -9985,141 +9985,7 @@
                           </a:solidFill>
                           <a:latin typeface="Calibri"/>
                         </a:rPr>
-                        <a:t>6%</a:t>
-                      </a:r>
-                    </a:p>
-                  </a:txBody>
-                  <a:tcPr>
-                    <a:solidFill>
-                      <a:srgbClr val="FFFFFF"/>
-                    </a:solidFill>
-                  </a:tcPr>
-                </a:tc>
-              </a:tr>
-              <a:tr h="292608">
-                <a:tc>
-                  <a:txBody>
-                    <a:bodyPr wrap="square"/>
-                    <a:lstStyle/>
-                    <a:p>
-                      <a:r>
-                        <a:rPr sz="1100" b="0">
-                          <a:solidFill>
-                            <a:srgbClr val="0B0B0B"/>
-                          </a:solidFill>
-                          <a:latin typeface="Calibri"/>
-                        </a:rPr>
-                        <a:t>Banco Inter</a:t>
-                      </a:r>
-                    </a:p>
-                  </a:txBody>
-                  <a:tcPr>
-                    <a:solidFill>
-                      <a:srgbClr val="FFFFFF"/>
-                    </a:solidFill>
-                  </a:tcPr>
-                </a:tc>
-                <a:tc>
-                  <a:txBody>
-                    <a:bodyPr wrap="square"/>
-                    <a:lstStyle/>
-                    <a:p>
-                      <a:r>
-                        <a:rPr sz="1100" b="0">
-                          <a:solidFill>
-                            <a:srgbClr val="0B0B0B"/>
-                          </a:solidFill>
-                          <a:latin typeface="Calibri"/>
-                        </a:rPr>
                         <a:t>-</a:t>
-                      </a:r>
-                    </a:p>
-                  </a:txBody>
-                  <a:tcPr>
-                    <a:solidFill>
-                      <a:srgbClr val="FFFFFF"/>
-                    </a:solidFill>
-                  </a:tcPr>
-                </a:tc>
-                <a:tc>
-                  <a:txBody>
-                    <a:bodyPr wrap="square"/>
-                    <a:lstStyle/>
-                    <a:p>
-                      <a:r>
-                        <a:rPr sz="1100" b="0">
-                          <a:solidFill>
-                            <a:srgbClr val="0B0B0B"/>
-                          </a:solidFill>
-                          <a:latin typeface="Calibri"/>
-                        </a:rPr>
-                        <a:t>-</a:t>
-                      </a:r>
-                    </a:p>
-                  </a:txBody>
-                  <a:tcPr>
-                    <a:solidFill>
-                      <a:srgbClr val="FFFFFF"/>
-                    </a:solidFill>
-                  </a:tcPr>
-                </a:tc>
-                <a:tc>
-                  <a:txBody>
-                    <a:bodyPr wrap="square"/>
-                    <a:lstStyle/>
-                    <a:p>
-                      <a:r>
-                        <a:rPr sz="1100" b="0">
-                          <a:solidFill>
-                            <a:srgbClr val="0B0B0B"/>
-                          </a:solidFill>
-                          <a:latin typeface="Calibri"/>
-                        </a:rPr>
-                        <a:t>-</a:t>
-                      </a:r>
-                    </a:p>
-                  </a:txBody>
-                  <a:tcPr>
-                    <a:solidFill>
-                      <a:srgbClr val="FFFFFF"/>
-                    </a:solidFill>
-                  </a:tcPr>
-                </a:tc>
-                <a:tc>
-                  <a:txBody>
-                    <a:bodyPr wrap="square"/>
-                    <a:lstStyle/>
-                    <a:p>
-                      <a:r>
-                        <a:rPr sz="1100" b="0">
-                          <a:solidFill>
-                            <a:srgbClr val="0B0B0B"/>
-                          </a:solidFill>
-                          <a:latin typeface="Calibri"/>
-                        </a:rPr>
-                        <a:t>-</a:t>
-                      </a:r>
-                    </a:p>
-                  </a:txBody>
-                  <a:tcPr>
-                    <a:solidFill>
-                      <a:srgbClr val="FFFFFF"/>
-                    </a:solidFill>
-                  </a:tcPr>
-                </a:tc>
-                <a:tc>
-                  <a:txBody>
-                    <a:bodyPr wrap="square"/>
-                    <a:lstStyle/>
-                    <a:p>
-                      <a:r>
-                        <a:rPr sz="1100" b="0">
-                          <a:solidFill>
-                            <a:srgbClr val="0B0B0B"/>
-                          </a:solidFill>
-                          <a:latin typeface="Calibri"/>
-                        </a:rPr>
-                        <a:t>99%</a:t>
                       </a:r>
                     </a:p>
                   </a:txBody>
@@ -10142,8 +10008,8 @@
         </p:nvSpPr>
         <p:spPr>
           <a:xfrm>
-            <a:off x="548640" y="3291839"/>
-            <a:ext cx="10972800" cy="457200"/>
+            <a:off x="548640" y="2999232"/>
+            <a:ext cx="10972800" cy="548640"/>
           </a:xfrm>
           <a:prstGeom prst="rect">
             <a:avLst/>
@@ -10163,7 +10029,7 @@
                 </a:solidFill>
                 <a:latin typeface="Calibri"/>
               </a:rPr>
-              <a:t>Taxa e a maxima publicada pela casa (mesma semantica do maxAdminFee do Open Finance). Celulas vazias = a fonte nao publica o campo.</a:t>
+              <a:t>Indice = taxa do fundo dividida pela mediana da MESMA categoria no universo de varejo da CVM. Nenhuma casa cobra 60% acima do mercado: a vitrine exibe a classe de varejo, que carrega a camada de distribuicao, e o universo inclui classes sem ela.</a:t>
             </a:r>
           </a:p>
         </p:txBody>

--- a/data/reports/prateleiras-2026-09-20.pptx
+++ b/data/reports/prateleiras-2026-09-20.pptx
@@ -6671,95 +6671,95 @@
                           </a:solidFill>
                           <a:latin typeface="Calibri"/>
                         </a:rPr>
-                        <a:t>BTG PACTUAL YIELD DI FI RF REF CP</a:t>
-                      </a:r>
-                    </a:p>
-                  </a:txBody>
-                  <a:tcPr>
-                    <a:solidFill>
-                      <a:srgbClr val="FFFFFF"/>
-                    </a:solidFill>
-                  </a:tcPr>
-                </a:tc>
-                <a:tc>
-                  <a:txBody>
-                    <a:bodyPr wrap="square"/>
-                    <a:lstStyle/>
-                    <a:p>
-                      <a:r>
-                        <a:rPr sz="1000" b="0">
-                          <a:solidFill>
-                            <a:srgbClr val="0B0B0B"/>
-                          </a:solidFill>
-                          <a:latin typeface="Calibri"/>
-                        </a:rPr>
-                        <a:t>Renda Fixa Duração Livre Grau de Invest.</a:t>
-                      </a:r>
-                    </a:p>
-                  </a:txBody>
-                  <a:tcPr>
-                    <a:solidFill>
-                      <a:srgbClr val="FFFFFF"/>
-                    </a:solidFill>
-                  </a:tcPr>
-                </a:tc>
-                <a:tc>
-                  <a:txBody>
-                    <a:bodyPr wrap="square"/>
-                    <a:lstStyle/>
-                    <a:p>
-                      <a:r>
-                        <a:rPr sz="1000" b="0">
-                          <a:solidFill>
-                            <a:srgbClr val="0B0B0B"/>
-                          </a:solidFill>
-                          <a:latin typeface="Calibri"/>
-                        </a:rPr>
-                        <a:t>BTG Pactual, Banco Inter</a:t>
-                      </a:r>
-                    </a:p>
-                  </a:txBody>
-                  <a:tcPr>
-                    <a:solidFill>
-                      <a:srgbClr val="FFFFFF"/>
-                    </a:solidFill>
-                  </a:tcPr>
-                </a:tc>
-                <a:tc>
-                  <a:txBody>
-                    <a:bodyPr wrap="square"/>
-                    <a:lstStyle/>
-                    <a:p>
-                      <a:r>
-                        <a:rPr sz="1000" b="0">
-                          <a:solidFill>
-                            <a:srgbClr val="0B0B0B"/>
-                          </a:solidFill>
-                          <a:latin typeface="Calibri"/>
-                        </a:rPr>
-                        <a:t>R$ 50.000</a:t>
-                      </a:r>
-                    </a:p>
-                  </a:txBody>
-                  <a:tcPr>
-                    <a:solidFill>
-                      <a:srgbClr val="FFFFFF"/>
-                    </a:solidFill>
-                  </a:tcPr>
-                </a:tc>
-                <a:tc>
-                  <a:txBody>
-                    <a:bodyPr wrap="square"/>
-                    <a:lstStyle/>
-                    <a:p>
-                      <a:r>
-                        <a:rPr sz="1000" b="0">
-                          <a:solidFill>
-                            <a:srgbClr val="0B0B0B"/>
-                          </a:solidFill>
-                          <a:latin typeface="Calibri"/>
-                        </a:rPr>
-                        <a:t>0,01%</a:t>
+                        <a:t>Safra Inteligencia Artificial FIM RL</a:t>
+                      </a:r>
+                    </a:p>
+                  </a:txBody>
+                  <a:tcPr>
+                    <a:solidFill>
+                      <a:srgbClr val="FFFFFF"/>
+                    </a:solidFill>
+                  </a:tcPr>
+                </a:tc>
+                <a:tc>
+                  <a:txBody>
+                    <a:bodyPr wrap="square"/>
+                    <a:lstStyle/>
+                    <a:p>
+                      <a:r>
+                        <a:rPr sz="1000" b="0">
+                          <a:solidFill>
+                            <a:srgbClr val="0B0B0B"/>
+                          </a:solidFill>
+                          <a:latin typeface="Calibri"/>
+                        </a:rPr>
+                        <a:t>Multimercados Estrat. Específica</a:t>
+                      </a:r>
+                    </a:p>
+                  </a:txBody>
+                  <a:tcPr>
+                    <a:solidFill>
+                      <a:srgbClr val="FFFFFF"/>
+                    </a:solidFill>
+                  </a:tcPr>
+                </a:tc>
+                <a:tc>
+                  <a:txBody>
+                    <a:bodyPr wrap="square"/>
+                    <a:lstStyle/>
+                    <a:p>
+                      <a:r>
+                        <a:rPr sz="1000" b="0">
+                          <a:solidFill>
+                            <a:srgbClr val="0B0B0B"/>
+                          </a:solidFill>
+                          <a:latin typeface="Calibri"/>
+                        </a:rPr>
+                        <a:t>BTG Pactual</a:t>
+                      </a:r>
+                    </a:p>
+                  </a:txBody>
+                  <a:tcPr>
+                    <a:solidFill>
+                      <a:srgbClr val="FFFFFF"/>
+                    </a:solidFill>
+                  </a:tcPr>
+                </a:tc>
+                <a:tc>
+                  <a:txBody>
+                    <a:bodyPr wrap="square"/>
+                    <a:lstStyle/>
+                    <a:p>
+                      <a:r>
+                        <a:rPr sz="1000" b="0">
+                          <a:solidFill>
+                            <a:srgbClr val="0B0B0B"/>
+                          </a:solidFill>
+                          <a:latin typeface="Calibri"/>
+                        </a:rPr>
+                        <a:t>R$ 1.000</a:t>
+                      </a:r>
+                    </a:p>
+                  </a:txBody>
+                  <a:tcPr>
+                    <a:solidFill>
+                      <a:srgbClr val="FFFFFF"/>
+                    </a:solidFill>
+                  </a:tcPr>
+                </a:tc>
+                <a:tc>
+                  <a:txBody>
+                    <a:bodyPr wrap="square"/>
+                    <a:lstStyle/>
+                    <a:p>
+                      <a:r>
+                        <a:rPr sz="1000" b="0">
+                          <a:solidFill>
+                            <a:srgbClr val="0B0B0B"/>
+                          </a:solidFill>
+                          <a:latin typeface="Calibri"/>
+                        </a:rPr>
+                        <a:t>1,25%</a:t>
                       </a:r>
                     </a:p>
                   </a:txBody>
@@ -6783,95 +6783,95 @@
                           </a:solidFill>
                           <a:latin typeface="Calibri"/>
                         </a:rPr>
-                        <a:t>BTG PACTUAL CRED CORP I FIQ DE FI RF CP LP</a:t>
-                      </a:r>
-                    </a:p>
-                  </a:txBody>
-                  <a:tcPr>
-                    <a:solidFill>
-                      <a:srgbClr val="FFFFFF"/>
-                    </a:solidFill>
-                  </a:tcPr>
-                </a:tc>
-                <a:tc>
-                  <a:txBody>
-                    <a:bodyPr wrap="square"/>
-                    <a:lstStyle/>
-                    <a:p>
-                      <a:r>
-                        <a:rPr sz="1000" b="0">
-                          <a:solidFill>
-                            <a:srgbClr val="0B0B0B"/>
-                          </a:solidFill>
-                          <a:latin typeface="Calibri"/>
-                        </a:rPr>
-                        <a:t>Renda Fixa Duração Livre Crédito Livre</a:t>
-                      </a:r>
-                    </a:p>
-                  </a:txBody>
-                  <a:tcPr>
-                    <a:solidFill>
-                      <a:srgbClr val="FFFFFF"/>
-                    </a:solidFill>
-                  </a:tcPr>
-                </a:tc>
-                <a:tc>
-                  <a:txBody>
-                    <a:bodyPr wrap="square"/>
-                    <a:lstStyle/>
-                    <a:p>
-                      <a:r>
-                        <a:rPr sz="1000" b="0">
-                          <a:solidFill>
-                            <a:srgbClr val="0B0B0B"/>
-                          </a:solidFill>
-                          <a:latin typeface="Calibri"/>
-                        </a:rPr>
-                        <a:t>BTG Pactual, Banco Inter</a:t>
-                      </a:r>
-                    </a:p>
-                  </a:txBody>
-                  <a:tcPr>
-                    <a:solidFill>
-                      <a:srgbClr val="FFFFFF"/>
-                    </a:solidFill>
-                  </a:tcPr>
-                </a:tc>
-                <a:tc>
-                  <a:txBody>
-                    <a:bodyPr wrap="square"/>
-                    <a:lstStyle/>
-                    <a:p>
-                      <a:r>
-                        <a:rPr sz="1000" b="0">
-                          <a:solidFill>
-                            <a:srgbClr val="0B0B0B"/>
-                          </a:solidFill>
-                          <a:latin typeface="Calibri"/>
-                        </a:rPr>
-                        <a:t>R$ 500.000</a:t>
-                      </a:r>
-                    </a:p>
-                  </a:txBody>
-                  <a:tcPr>
-                    <a:solidFill>
-                      <a:srgbClr val="FFFFFF"/>
-                    </a:solidFill>
-                  </a:tcPr>
-                </a:tc>
-                <a:tc>
-                  <a:txBody>
-                    <a:bodyPr wrap="square"/>
-                    <a:lstStyle/>
-                    <a:p>
-                      <a:r>
-                        <a:rPr sz="1000" b="0">
-                          <a:solidFill>
-                            <a:srgbClr val="0B0B0B"/>
-                          </a:solidFill>
-                          <a:latin typeface="Calibri"/>
-                        </a:rPr>
-                        <a:t>0,01%</a:t>
+                        <a:t>Mapfre Confianza Plus FIRF</a:t>
+                      </a:r>
+                    </a:p>
+                  </a:txBody>
+                  <a:tcPr>
+                    <a:solidFill>
+                      <a:srgbClr val="FFFFFF"/>
+                    </a:solidFill>
+                  </a:tcPr>
+                </a:tc>
+                <a:tc>
+                  <a:txBody>
+                    <a:bodyPr wrap="square"/>
+                    <a:lstStyle/>
+                    <a:p>
+                      <a:r>
+                        <a:rPr sz="1000" b="0">
+                          <a:solidFill>
+                            <a:srgbClr val="0B0B0B"/>
+                          </a:solidFill>
+                          <a:latin typeface="Calibri"/>
+                        </a:rPr>
+                        <a:t>Renda Fixa Duração Baixa Grau de Invest.</a:t>
+                      </a:r>
+                    </a:p>
+                  </a:txBody>
+                  <a:tcPr>
+                    <a:solidFill>
+                      <a:srgbClr val="FFFFFF"/>
+                    </a:solidFill>
+                  </a:tcPr>
+                </a:tc>
+                <a:tc>
+                  <a:txBody>
+                    <a:bodyPr wrap="square"/>
+                    <a:lstStyle/>
+                    <a:p>
+                      <a:r>
+                        <a:rPr sz="1000" b="0">
+                          <a:solidFill>
+                            <a:srgbClr val="0B0B0B"/>
+                          </a:solidFill>
+                          <a:latin typeface="Calibri"/>
+                        </a:rPr>
+                        <a:t>BTG Pactual</a:t>
+                      </a:r>
+                    </a:p>
+                  </a:txBody>
+                  <a:tcPr>
+                    <a:solidFill>
+                      <a:srgbClr val="FFFFFF"/>
+                    </a:solidFill>
+                  </a:tcPr>
+                </a:tc>
+                <a:tc>
+                  <a:txBody>
+                    <a:bodyPr wrap="square"/>
+                    <a:lstStyle/>
+                    <a:p>
+                      <a:r>
+                        <a:rPr sz="1000" b="0">
+                          <a:solidFill>
+                            <a:srgbClr val="0B0B0B"/>
+                          </a:solidFill>
+                          <a:latin typeface="Calibri"/>
+                        </a:rPr>
+                        <a:t>R$ 1</a:t>
+                      </a:r>
+                    </a:p>
+                  </a:txBody>
+                  <a:tcPr>
+                    <a:solidFill>
+                      <a:srgbClr val="FFFFFF"/>
+                    </a:solidFill>
+                  </a:tcPr>
+                </a:tc>
+                <a:tc>
+                  <a:txBody>
+                    <a:bodyPr wrap="square"/>
+                    <a:lstStyle/>
+                    <a:p>
+                      <a:r>
+                        <a:rPr sz="1000" b="0">
+                          <a:solidFill>
+                            <a:srgbClr val="0B0B0B"/>
+                          </a:solidFill>
+                          <a:latin typeface="Calibri"/>
+                        </a:rPr>
+                        <a:t>-</a:t>
                       </a:r>
                     </a:p>
                   </a:txBody>
@@ -6895,95 +6895,95 @@
                           </a:solidFill>
                           <a:latin typeface="Calibri"/>
                         </a:rPr>
-                        <a:t>ABSOLUTE HIDRA CDI FIC FIRF RF INVES EM INFRA CP</a:t>
-                      </a:r>
-                    </a:p>
-                  </a:txBody>
-                  <a:tcPr>
-                    <a:solidFill>
-                      <a:srgbClr val="FFFFFF"/>
-                    </a:solidFill>
-                  </a:tcPr>
-                </a:tc>
-                <a:tc>
-                  <a:txBody>
-                    <a:bodyPr wrap="square"/>
-                    <a:lstStyle/>
-                    <a:p>
-                      <a:r>
-                        <a:rPr sz="1000" b="0">
-                          <a:solidFill>
-                            <a:srgbClr val="0B0B0B"/>
-                          </a:solidFill>
-                          <a:latin typeface="Calibri"/>
-                        </a:rPr>
-                        <a:t>Renda Fixa Duração Baixa Grau de Invest.</a:t>
-                      </a:r>
-                    </a:p>
-                  </a:txBody>
-                  <a:tcPr>
-                    <a:solidFill>
-                      <a:srgbClr val="FFFFFF"/>
-                    </a:solidFill>
-                  </a:tcPr>
-                </a:tc>
-                <a:tc>
-                  <a:txBody>
-                    <a:bodyPr wrap="square"/>
-                    <a:lstStyle/>
-                    <a:p>
-                      <a:r>
-                        <a:rPr sz="1000" b="0">
-                          <a:solidFill>
-                            <a:srgbClr val="0B0B0B"/>
-                          </a:solidFill>
-                          <a:latin typeface="Calibri"/>
-                        </a:rPr>
-                        <a:t>BTG Pactual, Banco Inter</a:t>
-                      </a:r>
-                    </a:p>
-                  </a:txBody>
-                  <a:tcPr>
-                    <a:solidFill>
-                      <a:srgbClr val="FFFFFF"/>
-                    </a:solidFill>
-                  </a:tcPr>
-                </a:tc>
-                <a:tc>
-                  <a:txBody>
-                    <a:bodyPr wrap="square"/>
-                    <a:lstStyle/>
-                    <a:p>
-                      <a:r>
-                        <a:rPr sz="1000" b="0">
-                          <a:solidFill>
-                            <a:srgbClr val="0B0B0B"/>
-                          </a:solidFill>
-                          <a:latin typeface="Calibri"/>
-                        </a:rPr>
-                        <a:t>R$ 50.000</a:t>
-                      </a:r>
-                    </a:p>
-                  </a:txBody>
-                  <a:tcPr>
-                    <a:solidFill>
-                      <a:srgbClr val="FFFFFF"/>
-                    </a:solidFill>
-                  </a:tcPr>
-                </a:tc>
-                <a:tc>
-                  <a:txBody>
-                    <a:bodyPr wrap="square"/>
-                    <a:lstStyle/>
-                    <a:p>
-                      <a:r>
-                        <a:rPr sz="1000" b="0">
-                          <a:solidFill>
-                            <a:srgbClr val="0B0B0B"/>
-                          </a:solidFill>
-                          <a:latin typeface="Calibri"/>
-                        </a:rPr>
-                        <a:t>0,01%</a:t>
+                        <a:t>Kinea Atacama FIRF RL Subclasse I</a:t>
+                      </a:r>
+                    </a:p>
+                  </a:txBody>
+                  <a:tcPr>
+                    <a:solidFill>
+                      <a:srgbClr val="FFFFFF"/>
+                    </a:solidFill>
+                  </a:tcPr>
+                </a:tc>
+                <a:tc>
+                  <a:txBody>
+                    <a:bodyPr wrap="square"/>
+                    <a:lstStyle/>
+                    <a:p>
+                      <a:r>
+                        <a:rPr sz="1000" b="0">
+                          <a:solidFill>
+                            <a:srgbClr val="0B0B0B"/>
+                          </a:solidFill>
+                          <a:latin typeface="Calibri"/>
+                        </a:rPr>
+                        <a:t>Renda Fixa Duração Livre Crédito Livre</a:t>
+                      </a:r>
+                    </a:p>
+                  </a:txBody>
+                  <a:tcPr>
+                    <a:solidFill>
+                      <a:srgbClr val="FFFFFF"/>
+                    </a:solidFill>
+                  </a:tcPr>
+                </a:tc>
+                <a:tc>
+                  <a:txBody>
+                    <a:bodyPr wrap="square"/>
+                    <a:lstStyle/>
+                    <a:p>
+                      <a:r>
+                        <a:rPr sz="1000" b="0">
+                          <a:solidFill>
+                            <a:srgbClr val="0B0B0B"/>
+                          </a:solidFill>
+                          <a:latin typeface="Calibri"/>
+                        </a:rPr>
+                        <a:t>BTG Pactual</a:t>
+                      </a:r>
+                    </a:p>
+                  </a:txBody>
+                  <a:tcPr>
+                    <a:solidFill>
+                      <a:srgbClr val="FFFFFF"/>
+                    </a:solidFill>
+                  </a:tcPr>
+                </a:tc>
+                <a:tc>
+                  <a:txBody>
+                    <a:bodyPr wrap="square"/>
+                    <a:lstStyle/>
+                    <a:p>
+                      <a:r>
+                        <a:rPr sz="1000" b="0">
+                          <a:solidFill>
+                            <a:srgbClr val="0B0B0B"/>
+                          </a:solidFill>
+                          <a:latin typeface="Calibri"/>
+                        </a:rPr>
+                        <a:t>R$ 1</a:t>
+                      </a:r>
+                    </a:p>
+                  </a:txBody>
+                  <a:tcPr>
+                    <a:solidFill>
+                      <a:srgbClr val="FFFFFF"/>
+                    </a:solidFill>
+                  </a:tcPr>
+                </a:tc>
+                <a:tc>
+                  <a:txBody>
+                    <a:bodyPr wrap="square"/>
+                    <a:lstStyle/>
+                    <a:p>
+                      <a:r>
+                        <a:rPr sz="1000" b="0">
+                          <a:solidFill>
+                            <a:srgbClr val="0B0B0B"/>
+                          </a:solidFill>
+                          <a:latin typeface="Calibri"/>
+                        </a:rPr>
+                        <a:t>0,06%</a:t>
                       </a:r>
                     </a:p>
                   </a:txBody>
@@ -7007,95 +7007,95 @@
                           </a:solidFill>
                           <a:latin typeface="Calibri"/>
                         </a:rPr>
-                        <a:t>ABSOLUTE PACE LONG BIASED FIC DE FIA RL</a:t>
-                      </a:r>
-                    </a:p>
-                  </a:txBody>
-                  <a:tcPr>
-                    <a:solidFill>
-                      <a:srgbClr val="FFFFFF"/>
-                    </a:solidFill>
-                  </a:tcPr>
-                </a:tc>
-                <a:tc>
-                  <a:txBody>
-                    <a:bodyPr wrap="square"/>
-                    <a:lstStyle/>
-                    <a:p>
-                      <a:r>
-                        <a:rPr sz="1000" b="0">
-                          <a:solidFill>
-                            <a:srgbClr val="0B0B0B"/>
-                          </a:solidFill>
-                          <a:latin typeface="Calibri"/>
-                        </a:rPr>
-                        <a:t>Ações Livre</a:t>
-                      </a:r>
-                    </a:p>
-                  </a:txBody>
-                  <a:tcPr>
-                    <a:solidFill>
-                      <a:srgbClr val="FFFFFF"/>
-                    </a:solidFill>
-                  </a:tcPr>
-                </a:tc>
-                <a:tc>
-                  <a:txBody>
-                    <a:bodyPr wrap="square"/>
-                    <a:lstStyle/>
-                    <a:p>
-                      <a:r>
-                        <a:rPr sz="1000" b="0">
-                          <a:solidFill>
-                            <a:srgbClr val="0B0B0B"/>
-                          </a:solidFill>
-                          <a:latin typeface="Calibri"/>
-                        </a:rPr>
-                        <a:t>BTG Pactual, Banco Inter</a:t>
-                      </a:r>
-                    </a:p>
-                  </a:txBody>
-                  <a:tcPr>
-                    <a:solidFill>
-                      <a:srgbClr val="FFFFFF"/>
-                    </a:solidFill>
-                  </a:tcPr>
-                </a:tc>
-                <a:tc>
-                  <a:txBody>
-                    <a:bodyPr wrap="square"/>
-                    <a:lstStyle/>
-                    <a:p>
-                      <a:r>
-                        <a:rPr sz="1000" b="0">
-                          <a:solidFill>
-                            <a:srgbClr val="0B0B0B"/>
-                          </a:solidFill>
-                          <a:latin typeface="Calibri"/>
-                        </a:rPr>
-                        <a:t>R$ 50.000</a:t>
-                      </a:r>
-                    </a:p>
-                  </a:txBody>
-                  <a:tcPr>
-                    <a:solidFill>
-                      <a:srgbClr val="FFFFFF"/>
-                    </a:solidFill>
-                  </a:tcPr>
-                </a:tc>
-                <a:tc>
-                  <a:txBody>
-                    <a:bodyPr wrap="square"/>
-                    <a:lstStyle/>
-                    <a:p>
-                      <a:r>
-                        <a:rPr sz="1000" b="0">
-                          <a:solidFill>
-                            <a:srgbClr val="0B0B0B"/>
-                          </a:solidFill>
-                          <a:latin typeface="Calibri"/>
-                        </a:rPr>
-                        <a:t>0,02%</a:t>
+                        <a:t>Itau Artax Endurance Dist. FICFIM RL</a:t>
+                      </a:r>
+                    </a:p>
+                  </a:txBody>
+                  <a:tcPr>
+                    <a:solidFill>
+                      <a:srgbClr val="FFFFFF"/>
+                    </a:solidFill>
+                  </a:tcPr>
+                </a:tc>
+                <a:tc>
+                  <a:txBody>
+                    <a:bodyPr wrap="square"/>
+                    <a:lstStyle/>
+                    <a:p>
+                      <a:r>
+                        <a:rPr sz="1000" b="0">
+                          <a:solidFill>
+                            <a:srgbClr val="0B0B0B"/>
+                          </a:solidFill>
+                          <a:latin typeface="Calibri"/>
+                        </a:rPr>
+                        <a:t>Multimercados Livre</a:t>
+                      </a:r>
+                    </a:p>
+                  </a:txBody>
+                  <a:tcPr>
+                    <a:solidFill>
+                      <a:srgbClr val="FFFFFF"/>
+                    </a:solidFill>
+                  </a:tcPr>
+                </a:tc>
+                <a:tc>
+                  <a:txBody>
+                    <a:bodyPr wrap="square"/>
+                    <a:lstStyle/>
+                    <a:p>
+                      <a:r>
+                        <a:rPr sz="1000" b="0">
+                          <a:solidFill>
+                            <a:srgbClr val="0B0B0B"/>
+                          </a:solidFill>
+                          <a:latin typeface="Calibri"/>
+                        </a:rPr>
+                        <a:t>BTG Pactual</a:t>
+                      </a:r>
+                    </a:p>
+                  </a:txBody>
+                  <a:tcPr>
+                    <a:solidFill>
+                      <a:srgbClr val="FFFFFF"/>
+                    </a:solidFill>
+                  </a:tcPr>
+                </a:tc>
+                <a:tc>
+                  <a:txBody>
+                    <a:bodyPr wrap="square"/>
+                    <a:lstStyle/>
+                    <a:p>
+                      <a:r>
+                        <a:rPr sz="1000" b="0">
+                          <a:solidFill>
+                            <a:srgbClr val="0B0B0B"/>
+                          </a:solidFill>
+                          <a:latin typeface="Calibri"/>
+                        </a:rPr>
+                        <a:t>R$ 1</a:t>
+                      </a:r>
+                    </a:p>
+                  </a:txBody>
+                  <a:tcPr>
+                    <a:solidFill>
+                      <a:srgbClr val="FFFFFF"/>
+                    </a:solidFill>
+                  </a:tcPr>
+                </a:tc>
+                <a:tc>
+                  <a:txBody>
+                    <a:bodyPr wrap="square"/>
+                    <a:lstStyle/>
+                    <a:p>
+                      <a:r>
+                        <a:rPr sz="1000" b="0">
+                          <a:solidFill>
+                            <a:srgbClr val="0B0B0B"/>
+                          </a:solidFill>
+                          <a:latin typeface="Calibri"/>
+                        </a:rPr>
+                        <a:t>2%</a:t>
                       </a:r>
                     </a:p>
                   </a:txBody>
@@ -7119,7 +7119,7 @@
                           </a:solidFill>
                           <a:latin typeface="Calibri"/>
                         </a:rPr>
-                        <a:t>SOLIS CAPITAL ANTARES CP FIC DE FIM LP</a:t>
+                        <a:t>V8 Mercury FIRF LP CrPr RL</a:t>
                       </a:r>
                     </a:p>
                   </a:txBody>
@@ -7163,51 +7163,51 @@
                           </a:solidFill>
                           <a:latin typeface="Calibri"/>
                         </a:rPr>
-                        <a:t>BTG Pactual, Itau (Ion)</a:t>
-                      </a:r>
-                    </a:p>
-                  </a:txBody>
-                  <a:tcPr>
-                    <a:solidFill>
-                      <a:srgbClr val="FFFFFF"/>
-                    </a:solidFill>
-                  </a:tcPr>
-                </a:tc>
-                <a:tc>
-                  <a:txBody>
-                    <a:bodyPr wrap="square"/>
-                    <a:lstStyle/>
-                    <a:p>
-                      <a:r>
-                        <a:rPr sz="1000" b="0">
-                          <a:solidFill>
-                            <a:srgbClr val="0B0B0B"/>
-                          </a:solidFill>
-                          <a:latin typeface="Calibri"/>
-                        </a:rPr>
-                        <a:t>R$ 1.000.000</a:t>
-                      </a:r>
-                    </a:p>
-                  </a:txBody>
-                  <a:tcPr>
-                    <a:solidFill>
-                      <a:srgbClr val="FFFFFF"/>
-                    </a:solidFill>
-                  </a:tcPr>
-                </a:tc>
-                <a:tc>
-                  <a:txBody>
-                    <a:bodyPr wrap="square"/>
-                    <a:lstStyle/>
-                    <a:p>
-                      <a:r>
-                        <a:rPr sz="1000" b="0">
-                          <a:solidFill>
-                            <a:srgbClr val="0B0B0B"/>
-                          </a:solidFill>
-                          <a:latin typeface="Calibri"/>
-                        </a:rPr>
-                        <a:t>0,00%</a:t>
+                        <a:t>BTG Pactual</a:t>
+                      </a:r>
+                    </a:p>
+                  </a:txBody>
+                  <a:tcPr>
+                    <a:solidFill>
+                      <a:srgbClr val="FFFFFF"/>
+                    </a:solidFill>
+                  </a:tcPr>
+                </a:tc>
+                <a:tc>
+                  <a:txBody>
+                    <a:bodyPr wrap="square"/>
+                    <a:lstStyle/>
+                    <a:p>
+                      <a:r>
+                        <a:rPr sz="1000" b="0">
+                          <a:solidFill>
+                            <a:srgbClr val="0B0B0B"/>
+                          </a:solidFill>
+                          <a:latin typeface="Calibri"/>
+                        </a:rPr>
+                        <a:t>R$ 100</a:t>
+                      </a:r>
+                    </a:p>
+                  </a:txBody>
+                  <a:tcPr>
+                    <a:solidFill>
+                      <a:srgbClr val="FFFFFF"/>
+                    </a:solidFill>
+                  </a:tcPr>
+                </a:tc>
+                <a:tc>
+                  <a:txBody>
+                    <a:bodyPr wrap="square"/>
+                    <a:lstStyle/>
+                    <a:p>
+                      <a:r>
+                        <a:rPr sz="1000" b="0">
+                          <a:solidFill>
+                            <a:srgbClr val="0B0B0B"/>
+                          </a:solidFill>
+                          <a:latin typeface="Calibri"/>
+                        </a:rPr>
+                        <a:t>0,80%</a:t>
                       </a:r>
                     </a:p>
                   </a:txBody>
@@ -7231,29 +7231,29 @@
                           </a:solidFill>
                           <a:latin typeface="Calibri"/>
                         </a:rPr>
-                        <a:t>INTER CONSERVADOR FUNDO DE INVESTIMENTO RF CP</a:t>
-                      </a:r>
-                    </a:p>
-                  </a:txBody>
-                  <a:tcPr>
-                    <a:solidFill>
-                      <a:srgbClr val="FFFFFF"/>
-                    </a:solidFill>
-                  </a:tcPr>
-                </a:tc>
-                <a:tc>
-                  <a:txBody>
-                    <a:bodyPr wrap="square"/>
-                    <a:lstStyle/>
-                    <a:p>
-                      <a:r>
-                        <a:rPr sz="1000" b="0">
-                          <a:solidFill>
-                            <a:srgbClr val="0B0B0B"/>
-                          </a:solidFill>
-                          <a:latin typeface="Calibri"/>
-                        </a:rPr>
-                        <a:t>Renda Fixa Duração Baixa Grau de Invest.</a:t>
+                        <a:t>AZ QUEST TR FIC FIM</a:t>
+                      </a:r>
+                    </a:p>
+                  </a:txBody>
+                  <a:tcPr>
+                    <a:solidFill>
+                      <a:srgbClr val="FFFFFF"/>
+                    </a:solidFill>
+                  </a:tcPr>
+                </a:tc>
+                <a:tc>
+                  <a:txBody>
+                    <a:bodyPr wrap="square"/>
+                    <a:lstStyle/>
+                    <a:p>
+                      <a:r>
+                        <a:rPr sz="1000" b="0">
+                          <a:solidFill>
+                            <a:srgbClr val="0B0B0B"/>
+                          </a:solidFill>
+                          <a:latin typeface="Calibri"/>
+                        </a:rPr>
+                        <a:t>Multimercados L/S - Direcional</a:t>
                       </a:r>
                     </a:p>
                   </a:txBody>
@@ -7297,29 +7297,29 @@
                           </a:solidFill>
                           <a:latin typeface="Calibri"/>
                         </a:rPr>
-                        <a:t>R$ 50.000</a:t>
-                      </a:r>
-                    </a:p>
-                  </a:txBody>
-                  <a:tcPr>
-                    <a:solidFill>
-                      <a:srgbClr val="FFFFFF"/>
-                    </a:solidFill>
-                  </a:tcPr>
-                </a:tc>
-                <a:tc>
-                  <a:txBody>
-                    <a:bodyPr wrap="square"/>
-                    <a:lstStyle/>
-                    <a:p>
-                      <a:r>
-                        <a:rPr sz="1000" b="0">
-                          <a:solidFill>
-                            <a:srgbClr val="0B0B0B"/>
-                          </a:solidFill>
-                          <a:latin typeface="Calibri"/>
-                        </a:rPr>
-                        <a:t>0,01%</a:t>
+                        <a:t>R$ 0</a:t>
+                      </a:r>
+                    </a:p>
+                  </a:txBody>
+                  <a:tcPr>
+                    <a:solidFill>
+                      <a:srgbClr val="FFFFFF"/>
+                    </a:solidFill>
+                  </a:tcPr>
+                </a:tc>
+                <a:tc>
+                  <a:txBody>
+                    <a:bodyPr wrap="square"/>
+                    <a:lstStyle/>
+                    <a:p>
+                      <a:r>
+                        <a:rPr sz="1000" b="0">
+                          <a:solidFill>
+                            <a:srgbClr val="0B0B0B"/>
+                          </a:solidFill>
+                          <a:latin typeface="Calibri"/>
+                        </a:rPr>
+                        <a:t>0,03%</a:t>
                       </a:r>
                     </a:p>
                   </a:txBody>
@@ -7343,29 +7343,29 @@
                           </a:solidFill>
                           <a:latin typeface="Calibri"/>
                         </a:rPr>
-                        <a:t>Root Capital High Yield FICFIM CrPr RL</a:t>
-                      </a:r>
-                    </a:p>
-                  </a:txBody>
-                  <a:tcPr>
-                    <a:solidFill>
-                      <a:srgbClr val="FFFFFF"/>
-                    </a:solidFill>
-                  </a:tcPr>
-                </a:tc>
-                <a:tc>
-                  <a:txBody>
-                    <a:bodyPr wrap="square"/>
-                    <a:lstStyle/>
-                    <a:p>
-                      <a:r>
-                        <a:rPr sz="1000" b="0">
-                          <a:solidFill>
-                            <a:srgbClr val="0B0B0B"/>
-                          </a:solidFill>
-                          <a:latin typeface="Calibri"/>
-                        </a:rPr>
-                        <a:t>Multimercados Macro</a:t>
+                        <a:t>ABSOLUTE ALPHA GLOBAL FIC FIM</a:t>
+                      </a:r>
+                    </a:p>
+                  </a:txBody>
+                  <a:tcPr>
+                    <a:solidFill>
+                      <a:srgbClr val="FFFFFF"/>
+                    </a:solidFill>
+                  </a:tcPr>
+                </a:tc>
+                <a:tc>
+                  <a:txBody>
+                    <a:bodyPr wrap="square"/>
+                    <a:lstStyle/>
+                    <a:p>
+                      <a:r>
+                        <a:rPr sz="1000" b="0">
+                          <a:solidFill>
+                            <a:srgbClr val="0B0B0B"/>
+                          </a:solidFill>
+                          <a:latin typeface="Calibri"/>
+                        </a:rPr>
+                        <a:t>Multimercados Estrat. Específica</a:t>
                       </a:r>
                     </a:p>
                   </a:txBody>
@@ -7409,29 +7409,29 @@
                           </a:solidFill>
                           <a:latin typeface="Calibri"/>
                         </a:rPr>
-                        <a:t>R$ 5.000</a:t>
-                      </a:r>
-                    </a:p>
-                  </a:txBody>
-                  <a:tcPr>
-                    <a:solidFill>
-                      <a:srgbClr val="FFFFFF"/>
-                    </a:solidFill>
-                  </a:tcPr>
-                </a:tc>
-                <a:tc>
-                  <a:txBody>
-                    <a:bodyPr wrap="square"/>
-                    <a:lstStyle/>
-                    <a:p>
-                      <a:r>
-                        <a:rPr sz="1000" b="0">
-                          <a:solidFill>
-                            <a:srgbClr val="0B0B0B"/>
-                          </a:solidFill>
-                          <a:latin typeface="Calibri"/>
-                        </a:rPr>
-                        <a:t>1,45%</a:t>
+                        <a:t>R$ 50.000</a:t>
+                      </a:r>
+                    </a:p>
+                  </a:txBody>
+                  <a:tcPr>
+                    <a:solidFill>
+                      <a:srgbClr val="FFFFFF"/>
+                    </a:solidFill>
+                  </a:tcPr>
+                </a:tc>
+                <a:tc>
+                  <a:txBody>
+                    <a:bodyPr wrap="square"/>
+                    <a:lstStyle/>
+                    <a:p>
+                      <a:r>
+                        <a:rPr sz="1000" b="0">
+                          <a:solidFill>
+                            <a:srgbClr val="0B0B0B"/>
+                          </a:solidFill>
+                          <a:latin typeface="Calibri"/>
+                        </a:rPr>
+                        <a:t>0,03%</a:t>
                       </a:r>
                     </a:p>
                   </a:txBody>
@@ -7455,51 +7455,51 @@
                           </a:solidFill>
                           <a:latin typeface="Calibri"/>
                         </a:rPr>
-                        <a:t>AZ QUEST LUCE FIC FI RF CP LP</a:t>
-                      </a:r>
-                    </a:p>
-                  </a:txBody>
-                  <a:tcPr>
-                    <a:solidFill>
-                      <a:srgbClr val="FFFFFF"/>
-                    </a:solidFill>
-                  </a:tcPr>
-                </a:tc>
-                <a:tc>
-                  <a:txBody>
-                    <a:bodyPr wrap="square"/>
-                    <a:lstStyle/>
-                    <a:p>
-                      <a:r>
-                        <a:rPr sz="1000" b="0">
-                          <a:solidFill>
-                            <a:srgbClr val="0B0B0B"/>
-                          </a:solidFill>
-                          <a:latin typeface="Calibri"/>
-                        </a:rPr>
-                        <a:t>Renda Fixa Duração Livre Grau de Invest.</a:t>
-                      </a:r>
-                    </a:p>
-                  </a:txBody>
-                  <a:tcPr>
-                    <a:solidFill>
-                      <a:srgbClr val="FFFFFF"/>
-                    </a:solidFill>
-                  </a:tcPr>
-                </a:tc>
-                <a:tc>
-                  <a:txBody>
-                    <a:bodyPr wrap="square"/>
-                    <a:lstStyle/>
-                    <a:p>
-                      <a:r>
-                        <a:rPr sz="1000" b="0">
-                          <a:solidFill>
-                            <a:srgbClr val="0B0B0B"/>
-                          </a:solidFill>
-                          <a:latin typeface="Calibri"/>
-                        </a:rPr>
-                        <a:t>BTG Pactual, Banco Inter</a:t>
+                        <a:t>ABSOLUTE HIDRA IPCA NTNB35 FIF EM COTAS DE FUNDOS</a:t>
+                      </a:r>
+                    </a:p>
+                  </a:txBody>
+                  <a:tcPr>
+                    <a:solidFill>
+                      <a:srgbClr val="FFFFFF"/>
+                    </a:solidFill>
+                  </a:tcPr>
+                </a:tc>
+                <a:tc>
+                  <a:txBody>
+                    <a:bodyPr wrap="square"/>
+                    <a:lstStyle/>
+                    <a:p>
+                      <a:r>
+                        <a:rPr sz="1000" b="0">
+                          <a:solidFill>
+                            <a:srgbClr val="0B0B0B"/>
+                          </a:solidFill>
+                          <a:latin typeface="Calibri"/>
+                        </a:rPr>
+                        <a:t>Previdência RF Duração Livre Crédito Liv</a:t>
+                      </a:r>
+                    </a:p>
+                  </a:txBody>
+                  <a:tcPr>
+                    <a:solidFill>
+                      <a:srgbClr val="FFFFFF"/>
+                    </a:solidFill>
+                  </a:tcPr>
+                </a:tc>
+                <a:tc>
+                  <a:txBody>
+                    <a:bodyPr wrap="square"/>
+                    <a:lstStyle/>
+                    <a:p>
+                      <a:r>
+                        <a:rPr sz="1000" b="0">
+                          <a:solidFill>
+                            <a:srgbClr val="0B0B0B"/>
+                          </a:solidFill>
+                          <a:latin typeface="Calibri"/>
+                        </a:rPr>
+                        <a:t>BTG Pactual</a:t>
                       </a:r>
                     </a:p>
                   </a:txBody>

--- a/data/reports/prateleiras-2026-09-20.pptx
+++ b/data/reports/prateleiras-2026-09-20.pptx
@@ -6516,7 +6516,7 @@
                 </a:solidFill>
                 <a:latin typeface="Calibri"/>
               </a:rPr>
-              <a:t>Maiores gaps (por presenca)</a:t>
+              <a:t>Maiores gaps (pelo que da para incluir)</a:t>
             </a:r>
           </a:p>
         </p:txBody>
@@ -6531,7 +6531,7 @@
         </p:nvGraphicFramePr>
         <p:xfrm>
           <a:off x="548640" y="3200400"/>
-          <a:ext cx="6857998" cy="2633472"/>
+          <a:ext cx="6858000" cy="2633472"/>
         </p:xfrm>
         <a:graphic>
           <a:graphicData uri="http://schemas.openxmlformats.org/drawingml/2006/table">
@@ -6540,11 +6540,11 @@
                 <a:tableStyleId>{5C22544A-7EE6-4342-B048-85BDC9FD1C3A}</a:tableStyleId>
               </a:tblPr>
               <a:tblGrid>
-                <a:gridCol w="2676292"/>
-                <a:gridCol w="1421780"/>
-                <a:gridCol w="1170878"/>
-                <a:gridCol w="836341"/>
-                <a:gridCol w="752707"/>
+                <a:gridCol w="2468880"/>
+                <a:gridCol w="1371600"/>
+                <a:gridCol w="1097280"/>
+                <a:gridCol w="914400"/>
+                <a:gridCol w="1005840"/>
               </a:tblGrid>
               <a:tr h="292608">
                 <a:tc>
@@ -6625,7 +6625,7 @@
                           </a:solidFill>
                           <a:latin typeface="Calibri"/>
                         </a:rPr>
-                        <a:t>Menor min</a:t>
+                        <a:t>Captacao</a:t>
                       </a:r>
                     </a:p>
                   </a:txBody>
@@ -6647,7 +6647,7 @@
                           </a:solidFill>
                           <a:latin typeface="Calibri"/>
                         </a:rPr>
-                        <a:t>Menor taxa</a:t>
+                        <a:t>Esforco</a:t>
                       </a:r>
                     </a:p>
                   </a:txBody>
@@ -6737,29 +6737,29 @@
                           </a:solidFill>
                           <a:latin typeface="Calibri"/>
                         </a:rPr>
-                        <a:t>R$ 1.000</a:t>
-                      </a:r>
-                    </a:p>
-                  </a:txBody>
-                  <a:tcPr>
-                    <a:solidFill>
-                      <a:srgbClr val="FFFFFF"/>
-                    </a:solidFill>
-                  </a:tcPr>
-                </a:tc>
-                <a:tc>
-                  <a:txBody>
-                    <a:bodyPr wrap="square"/>
-                    <a:lstStyle/>
-                    <a:p>
-                      <a:r>
-                        <a:rPr sz="1000" b="0">
-                          <a:solidFill>
-                            <a:srgbClr val="0B0B0B"/>
-                          </a:solidFill>
-                          <a:latin typeface="Calibri"/>
-                        </a:rPr>
-                        <a:t>1,25%</a:t>
+                        <a:t>+730 MM</a:t>
+                      </a:r>
+                    </a:p>
+                  </a:txBody>
+                  <a:tcPr>
+                    <a:solidFill>
+                      <a:srgbClr val="FFFFFF"/>
+                    </a:solidFill>
+                  </a:tcPr>
+                </a:tc>
+                <a:tc>
+                  <a:txBody>
+                    <a:bodyPr wrap="square"/>
+                    <a:lstStyle/>
+                    <a:p>
+                      <a:r>
+                        <a:rPr sz="1000" b="0">
+                          <a:solidFill>
+                            <a:srgbClr val="0B0B0B"/>
+                          </a:solidFill>
+                          <a:latin typeface="Calibri"/>
+                        </a:rPr>
+                        <a:t>inclusao operacional</a:t>
                       </a:r>
                     </a:p>
                   </a:txBody>
@@ -6849,29 +6849,29 @@
                           </a:solidFill>
                           <a:latin typeface="Calibri"/>
                         </a:rPr>
-                        <a:t>R$ 1</a:t>
-                      </a:r>
-                    </a:p>
-                  </a:txBody>
-                  <a:tcPr>
-                    <a:solidFill>
-                      <a:srgbClr val="FFFFFF"/>
-                    </a:solidFill>
-                  </a:tcPr>
-                </a:tc>
-                <a:tc>
-                  <a:txBody>
-                    <a:bodyPr wrap="square"/>
-                    <a:lstStyle/>
-                    <a:p>
-                      <a:r>
-                        <a:rPr sz="1000" b="0">
-                          <a:solidFill>
-                            <a:srgbClr val="0B0B0B"/>
-                          </a:solidFill>
-                          <a:latin typeface="Calibri"/>
-                        </a:rPr>
-                        <a:t>-</a:t>
+                        <a:t>+276 MM</a:t>
+                      </a:r>
+                    </a:p>
+                  </a:txBody>
+                  <a:tcPr>
+                    <a:solidFill>
+                      <a:srgbClr val="FFFFFF"/>
+                    </a:solidFill>
+                  </a:tcPr>
+                </a:tc>
+                <a:tc>
+                  <a:txBody>
+                    <a:bodyPr wrap="square"/>
+                    <a:lstStyle/>
+                    <a:p>
+                      <a:r>
+                        <a:rPr sz="1000" b="0">
+                          <a:solidFill>
+                            <a:srgbClr val="0B0B0B"/>
+                          </a:solidFill>
+                          <a:latin typeface="Calibri"/>
+                        </a:rPr>
+                        <a:t>inclusao operacional</a:t>
                       </a:r>
                     </a:p>
                   </a:txBody>
@@ -6961,29 +6961,29 @@
                           </a:solidFill>
                           <a:latin typeface="Calibri"/>
                         </a:rPr>
-                        <a:t>R$ 1</a:t>
-                      </a:r>
-                    </a:p>
-                  </a:txBody>
-                  <a:tcPr>
-                    <a:solidFill>
-                      <a:srgbClr val="FFFFFF"/>
-                    </a:solidFill>
-                  </a:tcPr>
-                </a:tc>
-                <a:tc>
-                  <a:txBody>
-                    <a:bodyPr wrap="square"/>
-                    <a:lstStyle/>
-                    <a:p>
-                      <a:r>
-                        <a:rPr sz="1000" b="0">
-                          <a:solidFill>
-                            <a:srgbClr val="0B0B0B"/>
-                          </a:solidFill>
-                          <a:latin typeface="Calibri"/>
-                        </a:rPr>
-                        <a:t>0,06%</a:t>
+                        <a:t>+95 MM</a:t>
+                      </a:r>
+                    </a:p>
+                  </a:txBody>
+                  <a:tcPr>
+                    <a:solidFill>
+                      <a:srgbClr val="FFFFFF"/>
+                    </a:solidFill>
+                  </a:tcPr>
+                </a:tc>
+                <a:tc>
+                  <a:txBody>
+                    <a:bodyPr wrap="square"/>
+                    <a:lstStyle/>
+                    <a:p>
+                      <a:r>
+                        <a:rPr sz="1000" b="0">
+                          <a:solidFill>
+                            <a:srgbClr val="0B0B0B"/>
+                          </a:solidFill>
+                          <a:latin typeface="Calibri"/>
+                        </a:rPr>
+                        <a:t>inclusao operacional</a:t>
                       </a:r>
                     </a:p>
                   </a:txBody>
@@ -7073,29 +7073,29 @@
                           </a:solidFill>
                           <a:latin typeface="Calibri"/>
                         </a:rPr>
-                        <a:t>R$ 1</a:t>
-                      </a:r>
-                    </a:p>
-                  </a:txBody>
-                  <a:tcPr>
-                    <a:solidFill>
-                      <a:srgbClr val="FFFFFF"/>
-                    </a:solidFill>
-                  </a:tcPr>
-                </a:tc>
-                <a:tc>
-                  <a:txBody>
-                    <a:bodyPr wrap="square"/>
-                    <a:lstStyle/>
-                    <a:p>
-                      <a:r>
-                        <a:rPr sz="1000" b="0">
-                          <a:solidFill>
-                            <a:srgbClr val="0B0B0B"/>
-                          </a:solidFill>
-                          <a:latin typeface="Calibri"/>
-                        </a:rPr>
-                        <a:t>2%</a:t>
+                        <a:t>+84 MM</a:t>
+                      </a:r>
+                    </a:p>
+                  </a:txBody>
+                  <a:tcPr>
+                    <a:solidFill>
+                      <a:srgbClr val="FFFFFF"/>
+                    </a:solidFill>
+                  </a:tcPr>
+                </a:tc>
+                <a:tc>
+                  <a:txBody>
+                    <a:bodyPr wrap="square"/>
+                    <a:lstStyle/>
+                    <a:p>
+                      <a:r>
+                        <a:rPr sz="1000" b="0">
+                          <a:solidFill>
+                            <a:srgbClr val="0B0B0B"/>
+                          </a:solidFill>
+                          <a:latin typeface="Calibri"/>
+                        </a:rPr>
+                        <a:t>inclusao operacional</a:t>
                       </a:r>
                     </a:p>
                   </a:txBody>
@@ -7185,29 +7185,29 @@
                           </a:solidFill>
                           <a:latin typeface="Calibri"/>
                         </a:rPr>
-                        <a:t>R$ 100</a:t>
-                      </a:r>
-                    </a:p>
-                  </a:txBody>
-                  <a:tcPr>
-                    <a:solidFill>
-                      <a:srgbClr val="FFFFFF"/>
-                    </a:solidFill>
-                  </a:tcPr>
-                </a:tc>
-                <a:tc>
-                  <a:txBody>
-                    <a:bodyPr wrap="square"/>
-                    <a:lstStyle/>
-                    <a:p>
-                      <a:r>
-                        <a:rPr sz="1000" b="0">
-                          <a:solidFill>
-                            <a:srgbClr val="0B0B0B"/>
-                          </a:solidFill>
-                          <a:latin typeface="Calibri"/>
-                        </a:rPr>
-                        <a:t>0,80%</a:t>
+                        <a:t>+71 MM</a:t>
+                      </a:r>
+                    </a:p>
+                  </a:txBody>
+                  <a:tcPr>
+                    <a:solidFill>
+                      <a:srgbClr val="FFFFFF"/>
+                    </a:solidFill>
+                  </a:tcPr>
+                </a:tc>
+                <a:tc>
+                  <a:txBody>
+                    <a:bodyPr wrap="square"/>
+                    <a:lstStyle/>
+                    <a:p>
+                      <a:r>
+                        <a:rPr sz="1000" b="0">
+                          <a:solidFill>
+                            <a:srgbClr val="0B0B0B"/>
+                          </a:solidFill>
+                          <a:latin typeface="Calibri"/>
+                        </a:rPr>
+                        <a:t>inclusao operacional</a:t>
                       </a:r>
                     </a:p>
                   </a:txBody>
@@ -7297,29 +7297,29 @@
                           </a:solidFill>
                           <a:latin typeface="Calibri"/>
                         </a:rPr>
-                        <a:t>R$ 0</a:t>
-                      </a:r>
-                    </a:p>
-                  </a:txBody>
-                  <a:tcPr>
-                    <a:solidFill>
-                      <a:srgbClr val="FFFFFF"/>
-                    </a:solidFill>
-                  </a:tcPr>
-                </a:tc>
-                <a:tc>
-                  <a:txBody>
-                    <a:bodyPr wrap="square"/>
-                    <a:lstStyle/>
-                    <a:p>
-                      <a:r>
-                        <a:rPr sz="1000" b="0">
-                          <a:solidFill>
-                            <a:srgbClr val="0B0B0B"/>
-                          </a:solidFill>
-                          <a:latin typeface="Calibri"/>
-                        </a:rPr>
-                        <a:t>0,03%</a:t>
+                        <a:t>+64 MM</a:t>
+                      </a:r>
+                    </a:p>
+                  </a:txBody>
+                  <a:tcPr>
+                    <a:solidFill>
+                      <a:srgbClr val="FFFFFF"/>
+                    </a:solidFill>
+                  </a:tcPr>
+                </a:tc>
+                <a:tc>
+                  <a:txBody>
+                    <a:bodyPr wrap="square"/>
+                    <a:lstStyle/>
+                    <a:p>
+                      <a:r>
+                        <a:rPr sz="1000" b="0">
+                          <a:solidFill>
+                            <a:srgbClr val="0B0B0B"/>
+                          </a:solidFill>
+                          <a:latin typeface="Calibri"/>
+                        </a:rPr>
+                        <a:t>inclusao operacional</a:t>
                       </a:r>
                     </a:p>
                   </a:txBody>
@@ -7409,29 +7409,29 @@
                           </a:solidFill>
                           <a:latin typeface="Calibri"/>
                         </a:rPr>
-                        <a:t>R$ 50.000</a:t>
-                      </a:r>
-                    </a:p>
-                  </a:txBody>
-                  <a:tcPr>
-                    <a:solidFill>
-                      <a:srgbClr val="FFFFFF"/>
-                    </a:solidFill>
-                  </a:tcPr>
-                </a:tc>
-                <a:tc>
-                  <a:txBody>
-                    <a:bodyPr wrap="square"/>
-                    <a:lstStyle/>
-                    <a:p>
-                      <a:r>
-                        <a:rPr sz="1000" b="0">
-                          <a:solidFill>
-                            <a:srgbClr val="0B0B0B"/>
-                          </a:solidFill>
-                          <a:latin typeface="Calibri"/>
-                        </a:rPr>
-                        <a:t>0,03%</a:t>
+                        <a:t>+60 MM</a:t>
+                      </a:r>
+                    </a:p>
+                  </a:txBody>
+                  <a:tcPr>
+                    <a:solidFill>
+                      <a:srgbClr val="FFFFFF"/>
+                    </a:solidFill>
+                  </a:tcPr>
+                </a:tc>
+                <a:tc>
+                  <a:txBody>
+                    <a:bodyPr wrap="square"/>
+                    <a:lstStyle/>
+                    <a:p>
+                      <a:r>
+                        <a:rPr sz="1000" b="0">
+                          <a:solidFill>
+                            <a:srgbClr val="0B0B0B"/>
+                          </a:solidFill>
+                          <a:latin typeface="Calibri"/>
+                        </a:rPr>
+                        <a:t>inclusao operacional</a:t>
                       </a:r>
                     </a:p>
                   </a:txBody>
@@ -7521,29 +7521,29 @@
                           </a:solidFill>
                           <a:latin typeface="Calibri"/>
                         </a:rPr>
-                        <a:t>R$ 50.000</a:t>
-                      </a:r>
-                    </a:p>
-                  </a:txBody>
-                  <a:tcPr>
-                    <a:solidFill>
-                      <a:srgbClr val="FFFFFF"/>
-                    </a:solidFill>
-                  </a:tcPr>
-                </a:tc>
-                <a:tc>
-                  <a:txBody>
-                    <a:bodyPr wrap="square"/>
-                    <a:lstStyle/>
-                    <a:p>
-                      <a:r>
-                        <a:rPr sz="1000" b="0">
-                          <a:solidFill>
-                            <a:srgbClr val="0B0B0B"/>
-                          </a:solidFill>
-                          <a:latin typeface="Calibri"/>
-                        </a:rPr>
-                        <a:t>0,01%</a:t>
+                        <a:t>+52 MM</a:t>
+                      </a:r>
+                    </a:p>
+                  </a:txBody>
+                  <a:tcPr>
+                    <a:solidFill>
+                      <a:srgbClr val="FFFFFF"/>
+                    </a:solidFill>
+                  </a:tcPr>
+                </a:tc>
+                <a:tc>
+                  <a:txBody>
+                    <a:bodyPr wrap="square"/>
+                    <a:lstStyle/>
+                    <a:p>
+                      <a:r>
+                        <a:rPr sz="1000" b="0">
+                          <a:solidFill>
+                            <a:srgbClr val="0B0B0B"/>
+                          </a:solidFill>
+                          <a:latin typeface="Calibri"/>
+                        </a:rPr>
+                        <a:t>inclusao operacional</a:t>
                       </a:r>
                     </a:p>
                   </a:txBody>
